--- a/pybricks-custom-firmware-src/micropython/lib/pico-sdk/lib/btstack/doc/manual/docs-template/picts/btstack-figs.pptx
+++ b/pybricks-custom-firmware-src/micropython/lib/pico-sdk/lib/btstack/doc/manual/docs-template/picts/btstack-figs.pptx
@@ -1,3 +1,118 @@
+
+<file path=ppt/presentation.xml><?xml version="1.0" encoding="utf-8"?>
+<p:presentation xmlns:a="http://schemas.openxmlformats.org/drawingml/2006/main" xmlns:r="http://schemas.openxmlformats.org/officeDocument/2006/relationships" xmlns:mc="http://schemas.openxmlformats.org/markup-compatibility/2006" xmlns:mv="urn:schemas-microsoft-com:mac:vml" xmlns:p="http://schemas.openxmlformats.org/presentationml/2006/main" mc:Ignorable="mv" mc:PreserveAttributes="mv:*" saveSubsetFonts="1" autoCompressPictures="0">
+  <p:sldMasterIdLst>
+    <p:sldMasterId r:id="rId1"/>
+  </p:sldMasterIdLst>
+  <p:notesMasterIdLst>
+    <p:notesMasterId r:id="rId4"/>
+  </p:notesMasterIdLst>
+  <p:handoutMasterIdLst>
+    <p:handoutMasterId r:id="rId5"/>
+  </p:handoutMasterIdLst>
+  <p:sldIdLst>
+    <p:sldId id="269" r:id="rId2"/>
+    <p:sldId id="270" r:id="rId3"/>
+  </p:sldIdLst>
+  <p:sldSz cx="9144000" cy="6858000" type="screen4x3"/>
+  <p:notesSz cx="9144000" cy="6858000"/>
+  <p:defaultTextStyle>
+    <a:defPPr>
+      <a:defRPr lang="en-US"/>
+    </a:defPPr>
+    <a:lvl1pPr marL="0" algn="l" defTabSz="457200" rtl="0" eaLnBrk="1" latinLnBrk="0" hangingPunct="1">
+      <a:defRPr sz="1800" kern="1200">
+        <a:solidFill>
+          <a:schemeClr val="tx1"/>
+        </a:solidFill>
+        <a:latin typeface="+mn-lt"/>
+        <a:ea typeface="+mn-ea"/>
+        <a:cs typeface="+mn-cs"/>
+      </a:defRPr>
+    </a:lvl1pPr>
+    <a:lvl2pPr marL="457200" algn="l" defTabSz="457200" rtl="0" eaLnBrk="1" latinLnBrk="0" hangingPunct="1">
+      <a:defRPr sz="1800" kern="1200">
+        <a:solidFill>
+          <a:schemeClr val="tx1"/>
+        </a:solidFill>
+        <a:latin typeface="+mn-lt"/>
+        <a:ea typeface="+mn-ea"/>
+        <a:cs typeface="+mn-cs"/>
+      </a:defRPr>
+    </a:lvl2pPr>
+    <a:lvl3pPr marL="914400" algn="l" defTabSz="457200" rtl="0" eaLnBrk="1" latinLnBrk="0" hangingPunct="1">
+      <a:defRPr sz="1800" kern="1200">
+        <a:solidFill>
+          <a:schemeClr val="tx1"/>
+        </a:solidFill>
+        <a:latin typeface="+mn-lt"/>
+        <a:ea typeface="+mn-ea"/>
+        <a:cs typeface="+mn-cs"/>
+      </a:defRPr>
+    </a:lvl3pPr>
+    <a:lvl4pPr marL="1371600" algn="l" defTabSz="457200" rtl="0" eaLnBrk="1" latinLnBrk="0" hangingPunct="1">
+      <a:defRPr sz="1800" kern="1200">
+        <a:solidFill>
+          <a:schemeClr val="tx1"/>
+        </a:solidFill>
+        <a:latin typeface="+mn-lt"/>
+        <a:ea typeface="+mn-ea"/>
+        <a:cs typeface="+mn-cs"/>
+      </a:defRPr>
+    </a:lvl4pPr>
+    <a:lvl5pPr marL="1828800" algn="l" defTabSz="457200" rtl="0" eaLnBrk="1" latinLnBrk="0" hangingPunct="1">
+      <a:defRPr sz="1800" kern="1200">
+        <a:solidFill>
+          <a:schemeClr val="tx1"/>
+        </a:solidFill>
+        <a:latin typeface="+mn-lt"/>
+        <a:ea typeface="+mn-ea"/>
+        <a:cs typeface="+mn-cs"/>
+      </a:defRPr>
+    </a:lvl5pPr>
+    <a:lvl6pPr marL="2286000" algn="l" defTabSz="457200" rtl="0" eaLnBrk="1" latinLnBrk="0" hangingPunct="1">
+      <a:defRPr sz="1800" kern="1200">
+        <a:solidFill>
+          <a:schemeClr val="tx1"/>
+        </a:solidFill>
+        <a:latin typeface="+mn-lt"/>
+        <a:ea typeface="+mn-ea"/>
+        <a:cs typeface="+mn-cs"/>
+      </a:defRPr>
+    </a:lvl6pPr>
+    <a:lvl7pPr marL="2743200" algn="l" defTabSz="457200" rtl="0" eaLnBrk="1" latinLnBrk="0" hangingPunct="1">
+      <a:defRPr sz="1800" kern="1200">
+        <a:solidFill>
+          <a:schemeClr val="tx1"/>
+        </a:solidFill>
+        <a:latin typeface="+mn-lt"/>
+        <a:ea typeface="+mn-ea"/>
+        <a:cs typeface="+mn-cs"/>
+      </a:defRPr>
+    </a:lvl7pPr>
+    <a:lvl8pPr marL="3200400" algn="l" defTabSz="457200" rtl="0" eaLnBrk="1" latinLnBrk="0" hangingPunct="1">
+      <a:defRPr sz="1800" kern="1200">
+        <a:solidFill>
+          <a:schemeClr val="tx1"/>
+        </a:solidFill>
+        <a:latin typeface="+mn-lt"/>
+        <a:ea typeface="+mn-ea"/>
+        <a:cs typeface="+mn-cs"/>
+      </a:defRPr>
+    </a:lvl8pPr>
+    <a:lvl9pPr marL="3657600" algn="l" defTabSz="457200" rtl="0" eaLnBrk="1" latinLnBrk="0" hangingPunct="1">
+      <a:defRPr sz="1800" kern="1200">
+        <a:solidFill>
+          <a:schemeClr val="tx1"/>
+        </a:solidFill>
+        <a:latin typeface="+mn-lt"/>
+        <a:ea typeface="+mn-ea"/>
+        <a:cs typeface="+mn-cs"/>
+      </a:defRPr>
+    </a:lvl9pPr>
+  </p:defaultTextStyle>
+</p:presentation>
+</file>
 
 <file path=ppt/handoutMasters/handoutMaster1.xml><?xml version="1.0" encoding="utf-8"?>
 <p:handoutMaster xmlns:a="http://schemas.openxmlformats.org/drawingml/2006/main" xmlns:r="http://schemas.openxmlformats.org/officeDocument/2006/relationships" xmlns:mc="http://schemas.openxmlformats.org/markup-compatibility/2006" xmlns:mv="urn:schemas-microsoft-com:mac:vml" xmlns:p="http://schemas.openxmlformats.org/presentationml/2006/main" mc:Ignorable="mv" mc:PreserveAttributes="mv:*">
@@ -510,6 +625,1120 @@
 </p:notesMaster>
 </file>
 
+<file path=ppt/notesSlides/notesSlide1.xml><?xml version="1.0" encoding="utf-8"?>
+<p:notes xmlns:a="http://schemas.openxmlformats.org/drawingml/2006/main" xmlns:r="http://schemas.openxmlformats.org/officeDocument/2006/relationships" xmlns:mc="http://schemas.openxmlformats.org/markup-compatibility/2006" xmlns:mv="urn:schemas-microsoft-com:mac:vml" xmlns:p="http://schemas.openxmlformats.org/presentationml/2006/main" mc:Ignorable="mv" mc:PreserveAttributes="mv:*">
+  <p:cSld>
+    <p:spTree>
+      <p:nvGrpSpPr>
+        <p:cNvPr id="1" name=""/>
+        <p:cNvGrpSpPr/>
+        <p:nvPr/>
+      </p:nvGrpSpPr>
+      <p:grpSpPr>
+        <a:xfrm>
+          <a:off x="0" y="0"/>
+          <a:ext cx="0" cy="0"/>
+          <a:chOff x="0" y="0"/>
+          <a:chExt cx="0" cy="0"/>
+        </a:xfrm>
+      </p:grpSpPr>
+      <p:sp>
+        <p:nvSpPr>
+          <p:cNvPr id="2" name="Slide Image Placeholder 1"/>
+          <p:cNvSpPr>
+            <a:spLocks noGrp="1" noRot="1" noChangeAspect="1"/>
+          </p:cNvSpPr>
+          <p:nvPr>
+            <p:ph type="sldImg"/>
+          </p:nvPr>
+        </p:nvSpPr>
+        <p:spPr/>
+      </p:sp>
+      <p:sp>
+        <p:nvSpPr>
+          <p:cNvPr id="3" name="Notes Placeholder 2"/>
+          <p:cNvSpPr>
+            <a:spLocks noGrp="1"/>
+          </p:cNvSpPr>
+          <p:nvPr>
+            <p:ph type="body" idx="1"/>
+          </p:nvPr>
+        </p:nvSpPr>
+        <p:spPr/>
+        <p:txBody>
+          <a:bodyPr>
+            <a:normAutofit/>
+          </a:bodyPr>
+          <a:lstStyle/>
+          <a:p>
+            <a:pPr>
+              <a:buFontTx/>
+              <a:buChar char="-"/>
+            </a:pPr>
+            <a:r>
+              <a:rPr lang="en-US" dirty="0" smtClean="0"/>
+              <a:t>Do not have: SCO manager, OBEX</a:t>
+            </a:r>
+          </a:p>
+          <a:p>
+            <a:pPr>
+              <a:buFontTx/>
+              <a:buChar char="-"/>
+            </a:pPr>
+            <a:r>
+              <a:rPr lang="en-US" dirty="0" smtClean="0"/>
+              <a:t>Extra have: </a:t>
+            </a:r>
+          </a:p>
+          <a:p>
+            <a:pPr>
+              <a:buFontTx/>
+              <a:buChar char="-"/>
+            </a:pPr>
+            <a:endParaRPr lang="en-US" dirty="0" smtClean="0"/>
+          </a:p>
+          <a:p>
+            <a:pPr>
+              <a:buFontTx/>
+              <a:buChar char="-"/>
+            </a:pPr>
+            <a:r>
+              <a:rPr lang="en-US" dirty="0" smtClean="0"/>
+              <a:t>Dual/single</a:t>
+            </a:r>
+            <a:r>
+              <a:rPr lang="en-US" baseline="0" dirty="0" smtClean="0"/>
+              <a:t> mode arch </a:t>
+            </a:r>
+            <a:endParaRPr lang="en-US" dirty="0"/>
+          </a:p>
+        </p:txBody>
+      </p:sp>
+      <p:sp>
+        <p:nvSpPr>
+          <p:cNvPr id="4" name="Slide Number Placeholder 3"/>
+          <p:cNvSpPr>
+            <a:spLocks noGrp="1"/>
+          </p:cNvSpPr>
+          <p:nvPr>
+            <p:ph type="sldNum" sz="quarter" idx="10"/>
+          </p:nvPr>
+        </p:nvSpPr>
+        <p:spPr/>
+        <p:txBody>
+          <a:bodyPr/>
+          <a:lstStyle/>
+          <a:p>
+            <a:fld id="{E733BD58-334B-7C4E-9819-371AF0C02F66}" type="slidenum">
+              <a:rPr lang="en-US" smtClean="0"/>
+              <a:pPr/>
+              <a:t>1</a:t>
+            </a:fld>
+            <a:endParaRPr lang="en-US"/>
+          </a:p>
+        </p:txBody>
+      </p:sp>
+    </p:spTree>
+  </p:cSld>
+  <p:clrMapOvr>
+    <a:masterClrMapping/>
+  </p:clrMapOvr>
+</p:notes>
+</file>
+
+<file path=ppt/slideLayouts/slideLayout1.xml><?xml version="1.0" encoding="utf-8"?>
+<p:sldLayout xmlns:a="http://schemas.openxmlformats.org/drawingml/2006/main" xmlns:r="http://schemas.openxmlformats.org/officeDocument/2006/relationships" xmlns:mc="http://schemas.openxmlformats.org/markup-compatibility/2006" xmlns:mv="urn:schemas-microsoft-com:mac:vml" xmlns:p="http://schemas.openxmlformats.org/presentationml/2006/main" mc:Ignorable="mv" mc:PreserveAttributes="mv:*" type="title" preserve="1">
+  <p:cSld name="Title Slide">
+    <p:spTree>
+      <p:nvGrpSpPr>
+        <p:cNvPr id="1" name=""/>
+        <p:cNvGrpSpPr/>
+        <p:nvPr/>
+      </p:nvGrpSpPr>
+      <p:grpSpPr>
+        <a:xfrm>
+          <a:off x="0" y="0"/>
+          <a:ext cx="0" cy="0"/>
+          <a:chOff x="0" y="0"/>
+          <a:chExt cx="0" cy="0"/>
+        </a:xfrm>
+      </p:grpSpPr>
+      <p:sp>
+        <p:nvSpPr>
+          <p:cNvPr id="2" name="Title 1"/>
+          <p:cNvSpPr>
+            <a:spLocks noGrp="1"/>
+          </p:cNvSpPr>
+          <p:nvPr>
+            <p:ph type="ctrTitle"/>
+          </p:nvPr>
+        </p:nvSpPr>
+        <p:spPr>
+          <a:xfrm>
+            <a:off x="685800" y="2130427"/>
+            <a:ext cx="7772400" cy="1470025"/>
+          </a:xfrm>
+        </p:spPr>
+        <p:txBody>
+          <a:bodyPr/>
+          <a:lstStyle/>
+          <a:p>
+            <a:r>
+              <a:rPr lang="en-US" smtClean="0"/>
+              <a:t>Click to edit Master title style</a:t>
+            </a:r>
+            <a:endParaRPr lang="en-US"/>
+          </a:p>
+        </p:txBody>
+      </p:sp>
+      <p:sp>
+        <p:nvSpPr>
+          <p:cNvPr id="3" name="Subtitle 2"/>
+          <p:cNvSpPr>
+            <a:spLocks noGrp="1"/>
+          </p:cNvSpPr>
+          <p:nvPr>
+            <p:ph type="subTitle" idx="1"/>
+          </p:nvPr>
+        </p:nvSpPr>
+        <p:spPr>
+          <a:xfrm>
+            <a:off x="1371600" y="3886200"/>
+            <a:ext cx="6400800" cy="1752600"/>
+          </a:xfrm>
+        </p:spPr>
+        <p:txBody>
+          <a:bodyPr/>
+          <a:lstStyle>
+            <a:lvl1pPr marL="0" indent="0" algn="ctr">
+              <a:buNone/>
+              <a:defRPr>
+                <a:solidFill>
+                  <a:schemeClr val="tx1">
+                    <a:tint val="75000"/>
+                  </a:schemeClr>
+                </a:solidFill>
+              </a:defRPr>
+            </a:lvl1pPr>
+            <a:lvl2pPr marL="457200" indent="0" algn="ctr">
+              <a:buNone/>
+              <a:defRPr>
+                <a:solidFill>
+                  <a:schemeClr val="tx1">
+                    <a:tint val="75000"/>
+                  </a:schemeClr>
+                </a:solidFill>
+              </a:defRPr>
+            </a:lvl2pPr>
+            <a:lvl3pPr marL="914400" indent="0" algn="ctr">
+              <a:buNone/>
+              <a:defRPr>
+                <a:solidFill>
+                  <a:schemeClr val="tx1">
+                    <a:tint val="75000"/>
+                  </a:schemeClr>
+                </a:solidFill>
+              </a:defRPr>
+            </a:lvl3pPr>
+            <a:lvl4pPr marL="1371600" indent="0" algn="ctr">
+              <a:buNone/>
+              <a:defRPr>
+                <a:solidFill>
+                  <a:schemeClr val="tx1">
+                    <a:tint val="75000"/>
+                  </a:schemeClr>
+                </a:solidFill>
+              </a:defRPr>
+            </a:lvl4pPr>
+            <a:lvl5pPr marL="1828800" indent="0" algn="ctr">
+              <a:buNone/>
+              <a:defRPr>
+                <a:solidFill>
+                  <a:schemeClr val="tx1">
+                    <a:tint val="75000"/>
+                  </a:schemeClr>
+                </a:solidFill>
+              </a:defRPr>
+            </a:lvl5pPr>
+            <a:lvl6pPr marL="2286000" indent="0" algn="ctr">
+              <a:buNone/>
+              <a:defRPr>
+                <a:solidFill>
+                  <a:schemeClr val="tx1">
+                    <a:tint val="75000"/>
+                  </a:schemeClr>
+                </a:solidFill>
+              </a:defRPr>
+            </a:lvl6pPr>
+            <a:lvl7pPr marL="2743200" indent="0" algn="ctr">
+              <a:buNone/>
+              <a:defRPr>
+                <a:solidFill>
+                  <a:schemeClr val="tx1">
+                    <a:tint val="75000"/>
+                  </a:schemeClr>
+                </a:solidFill>
+              </a:defRPr>
+            </a:lvl7pPr>
+            <a:lvl8pPr marL="3200400" indent="0" algn="ctr">
+              <a:buNone/>
+              <a:defRPr>
+                <a:solidFill>
+                  <a:schemeClr val="tx1">
+                    <a:tint val="75000"/>
+                  </a:schemeClr>
+                </a:solidFill>
+              </a:defRPr>
+            </a:lvl8pPr>
+            <a:lvl9pPr marL="3657600" indent="0" algn="ctr">
+              <a:buNone/>
+              <a:defRPr>
+                <a:solidFill>
+                  <a:schemeClr val="tx1">
+                    <a:tint val="75000"/>
+                  </a:schemeClr>
+                </a:solidFill>
+              </a:defRPr>
+            </a:lvl9pPr>
+          </a:lstStyle>
+          <a:p>
+            <a:r>
+              <a:rPr lang="en-US" smtClean="0"/>
+              <a:t>Click to edit Master subtitle style</a:t>
+            </a:r>
+            <a:endParaRPr lang="en-US"/>
+          </a:p>
+        </p:txBody>
+      </p:sp>
+      <p:sp>
+        <p:nvSpPr>
+          <p:cNvPr id="4" name="Date Placeholder 3"/>
+          <p:cNvSpPr>
+            <a:spLocks noGrp="1"/>
+          </p:cNvSpPr>
+          <p:nvPr>
+            <p:ph type="dt" sz="half" idx="10"/>
+          </p:nvPr>
+        </p:nvSpPr>
+        <p:spPr/>
+        <p:txBody>
+          <a:bodyPr/>
+          <a:lstStyle/>
+          <a:p>
+            <a:fld id="{45253105-6222-E44C-A3C9-B345BB2DB333}" type="datetimeFigureOut">
+              <a:rPr lang="en-US" smtClean="0"/>
+              <a:pPr/>
+              <a:t>6/20/14</a:t>
+            </a:fld>
+            <a:endParaRPr lang="en-US"/>
+          </a:p>
+        </p:txBody>
+      </p:sp>
+      <p:sp>
+        <p:nvSpPr>
+          <p:cNvPr id="5" name="Footer Placeholder 4"/>
+          <p:cNvSpPr>
+            <a:spLocks noGrp="1"/>
+          </p:cNvSpPr>
+          <p:nvPr>
+            <p:ph type="ftr" sz="quarter" idx="11"/>
+          </p:nvPr>
+        </p:nvSpPr>
+        <p:spPr/>
+        <p:txBody>
+          <a:bodyPr/>
+          <a:lstStyle/>
+          <a:p>
+            <a:endParaRPr lang="en-US"/>
+          </a:p>
+        </p:txBody>
+      </p:sp>
+      <p:sp>
+        <p:nvSpPr>
+          <p:cNvPr id="6" name="Slide Number Placeholder 5"/>
+          <p:cNvSpPr>
+            <a:spLocks noGrp="1"/>
+          </p:cNvSpPr>
+          <p:nvPr>
+            <p:ph type="sldNum" sz="quarter" idx="12"/>
+          </p:nvPr>
+        </p:nvSpPr>
+        <p:spPr/>
+        <p:txBody>
+          <a:bodyPr/>
+          <a:lstStyle/>
+          <a:p>
+            <a:fld id="{A399DE09-9C7D-4B4C-A05E-F50BAD98C8AA}" type="slidenum">
+              <a:rPr lang="en-US" smtClean="0"/>
+              <a:pPr/>
+              <a:t>‹#›</a:t>
+            </a:fld>
+            <a:endParaRPr lang="en-US"/>
+          </a:p>
+        </p:txBody>
+      </p:sp>
+    </p:spTree>
+  </p:cSld>
+  <p:clrMapOvr>
+    <a:masterClrMapping/>
+  </p:clrMapOvr>
+</p:sldLayout>
+</file>
+
+<file path=ppt/slideLayouts/slideLayout10.xml><?xml version="1.0" encoding="utf-8"?>
+<p:sldLayout xmlns:a="http://schemas.openxmlformats.org/drawingml/2006/main" xmlns:r="http://schemas.openxmlformats.org/officeDocument/2006/relationships" xmlns:mc="http://schemas.openxmlformats.org/markup-compatibility/2006" xmlns:mv="urn:schemas-microsoft-com:mac:vml" xmlns:p="http://schemas.openxmlformats.org/presentationml/2006/main" mc:Ignorable="mv" mc:PreserveAttributes="mv:*" type="vertTx" preserve="1">
+  <p:cSld name="Title and Vertical Text">
+    <p:spTree>
+      <p:nvGrpSpPr>
+        <p:cNvPr id="1" name=""/>
+        <p:cNvGrpSpPr/>
+        <p:nvPr/>
+      </p:nvGrpSpPr>
+      <p:grpSpPr>
+        <a:xfrm>
+          <a:off x="0" y="0"/>
+          <a:ext cx="0" cy="0"/>
+          <a:chOff x="0" y="0"/>
+          <a:chExt cx="0" cy="0"/>
+        </a:xfrm>
+      </p:grpSpPr>
+      <p:sp>
+        <p:nvSpPr>
+          <p:cNvPr id="2" name="Title 1"/>
+          <p:cNvSpPr>
+            <a:spLocks noGrp="1"/>
+          </p:cNvSpPr>
+          <p:nvPr>
+            <p:ph type="title"/>
+          </p:nvPr>
+        </p:nvSpPr>
+        <p:spPr/>
+        <p:txBody>
+          <a:bodyPr/>
+          <a:lstStyle/>
+          <a:p>
+            <a:r>
+              <a:rPr lang="en-US" smtClean="0"/>
+              <a:t>Click to edit Master title style</a:t>
+            </a:r>
+            <a:endParaRPr lang="en-US"/>
+          </a:p>
+        </p:txBody>
+      </p:sp>
+      <p:sp>
+        <p:nvSpPr>
+          <p:cNvPr id="3" name="Vertical Text Placeholder 2"/>
+          <p:cNvSpPr>
+            <a:spLocks noGrp="1"/>
+          </p:cNvSpPr>
+          <p:nvPr>
+            <p:ph type="body" orient="vert" idx="1"/>
+          </p:nvPr>
+        </p:nvSpPr>
+        <p:spPr/>
+        <p:txBody>
+          <a:bodyPr vert="eaVert"/>
+          <a:lstStyle/>
+          <a:p>
+            <a:pPr lvl="0"/>
+            <a:r>
+              <a:rPr lang="en-US" smtClean="0"/>
+              <a:t>Click to edit Master text styles</a:t>
+            </a:r>
+          </a:p>
+          <a:p>
+            <a:pPr lvl="1"/>
+            <a:r>
+              <a:rPr lang="en-US" smtClean="0"/>
+              <a:t>Second level</a:t>
+            </a:r>
+          </a:p>
+          <a:p>
+            <a:pPr lvl="2"/>
+            <a:r>
+              <a:rPr lang="en-US" smtClean="0"/>
+              <a:t>Third level</a:t>
+            </a:r>
+          </a:p>
+          <a:p>
+            <a:pPr lvl="3"/>
+            <a:r>
+              <a:rPr lang="en-US" smtClean="0"/>
+              <a:t>Fourth level</a:t>
+            </a:r>
+          </a:p>
+          <a:p>
+            <a:pPr lvl="4"/>
+            <a:r>
+              <a:rPr lang="en-US" smtClean="0"/>
+              <a:t>Fifth level</a:t>
+            </a:r>
+            <a:endParaRPr lang="en-US"/>
+          </a:p>
+        </p:txBody>
+      </p:sp>
+      <p:sp>
+        <p:nvSpPr>
+          <p:cNvPr id="4" name="Date Placeholder 3"/>
+          <p:cNvSpPr>
+            <a:spLocks noGrp="1"/>
+          </p:cNvSpPr>
+          <p:nvPr>
+            <p:ph type="dt" sz="half" idx="10"/>
+          </p:nvPr>
+        </p:nvSpPr>
+        <p:spPr/>
+        <p:txBody>
+          <a:bodyPr/>
+          <a:lstStyle/>
+          <a:p>
+            <a:fld id="{45253105-6222-E44C-A3C9-B345BB2DB333}" type="datetimeFigureOut">
+              <a:rPr lang="en-US" smtClean="0"/>
+              <a:pPr/>
+              <a:t>6/20/14</a:t>
+            </a:fld>
+            <a:endParaRPr lang="en-US"/>
+          </a:p>
+        </p:txBody>
+      </p:sp>
+      <p:sp>
+        <p:nvSpPr>
+          <p:cNvPr id="5" name="Footer Placeholder 4"/>
+          <p:cNvSpPr>
+            <a:spLocks noGrp="1"/>
+          </p:cNvSpPr>
+          <p:nvPr>
+            <p:ph type="ftr" sz="quarter" idx="11"/>
+          </p:nvPr>
+        </p:nvSpPr>
+        <p:spPr/>
+        <p:txBody>
+          <a:bodyPr/>
+          <a:lstStyle/>
+          <a:p>
+            <a:endParaRPr lang="en-US"/>
+          </a:p>
+        </p:txBody>
+      </p:sp>
+      <p:sp>
+        <p:nvSpPr>
+          <p:cNvPr id="6" name="Slide Number Placeholder 5"/>
+          <p:cNvSpPr>
+            <a:spLocks noGrp="1"/>
+          </p:cNvSpPr>
+          <p:nvPr>
+            <p:ph type="sldNum" sz="quarter" idx="12"/>
+          </p:nvPr>
+        </p:nvSpPr>
+        <p:spPr/>
+        <p:txBody>
+          <a:bodyPr/>
+          <a:lstStyle/>
+          <a:p>
+            <a:fld id="{A399DE09-9C7D-4B4C-A05E-F50BAD98C8AA}" type="slidenum">
+              <a:rPr lang="en-US" smtClean="0"/>
+              <a:pPr/>
+              <a:t>‹#›</a:t>
+            </a:fld>
+            <a:endParaRPr lang="en-US"/>
+          </a:p>
+        </p:txBody>
+      </p:sp>
+    </p:spTree>
+  </p:cSld>
+  <p:clrMapOvr>
+    <a:masterClrMapping/>
+  </p:clrMapOvr>
+</p:sldLayout>
+</file>
+
+<file path=ppt/slideLayouts/slideLayout11.xml><?xml version="1.0" encoding="utf-8"?>
+<p:sldLayout xmlns:a="http://schemas.openxmlformats.org/drawingml/2006/main" xmlns:r="http://schemas.openxmlformats.org/officeDocument/2006/relationships" xmlns:mc="http://schemas.openxmlformats.org/markup-compatibility/2006" xmlns:mv="urn:schemas-microsoft-com:mac:vml" xmlns:p="http://schemas.openxmlformats.org/presentationml/2006/main" mc:Ignorable="mv" mc:PreserveAttributes="mv:*" type="vertTitleAndTx" preserve="1">
+  <p:cSld name="Vertical Title and Text">
+    <p:spTree>
+      <p:nvGrpSpPr>
+        <p:cNvPr id="1" name=""/>
+        <p:cNvGrpSpPr/>
+        <p:nvPr/>
+      </p:nvGrpSpPr>
+      <p:grpSpPr>
+        <a:xfrm>
+          <a:off x="0" y="0"/>
+          <a:ext cx="0" cy="0"/>
+          <a:chOff x="0" y="0"/>
+          <a:chExt cx="0" cy="0"/>
+        </a:xfrm>
+      </p:grpSpPr>
+      <p:sp>
+        <p:nvSpPr>
+          <p:cNvPr id="2" name="Vertical Title 1"/>
+          <p:cNvSpPr>
+            <a:spLocks noGrp="1"/>
+          </p:cNvSpPr>
+          <p:nvPr>
+            <p:ph type="title" orient="vert"/>
+          </p:nvPr>
+        </p:nvSpPr>
+        <p:spPr>
+          <a:xfrm>
+            <a:off x="6629400" y="274640"/>
+            <a:ext cx="2057400" cy="5851525"/>
+          </a:xfrm>
+        </p:spPr>
+        <p:txBody>
+          <a:bodyPr vert="eaVert"/>
+          <a:lstStyle/>
+          <a:p>
+            <a:r>
+              <a:rPr lang="en-US" smtClean="0"/>
+              <a:t>Click to edit Master title style</a:t>
+            </a:r>
+            <a:endParaRPr lang="en-US"/>
+          </a:p>
+        </p:txBody>
+      </p:sp>
+      <p:sp>
+        <p:nvSpPr>
+          <p:cNvPr id="3" name="Vertical Text Placeholder 2"/>
+          <p:cNvSpPr>
+            <a:spLocks noGrp="1"/>
+          </p:cNvSpPr>
+          <p:nvPr>
+            <p:ph type="body" orient="vert" idx="1"/>
+          </p:nvPr>
+        </p:nvSpPr>
+        <p:spPr>
+          <a:xfrm>
+            <a:off x="457200" y="274640"/>
+            <a:ext cx="6019800" cy="5851525"/>
+          </a:xfrm>
+        </p:spPr>
+        <p:txBody>
+          <a:bodyPr vert="eaVert"/>
+          <a:lstStyle/>
+          <a:p>
+            <a:pPr lvl="0"/>
+            <a:r>
+              <a:rPr lang="en-US" smtClean="0"/>
+              <a:t>Click to edit Master text styles</a:t>
+            </a:r>
+          </a:p>
+          <a:p>
+            <a:pPr lvl="1"/>
+            <a:r>
+              <a:rPr lang="en-US" smtClean="0"/>
+              <a:t>Second level</a:t>
+            </a:r>
+          </a:p>
+          <a:p>
+            <a:pPr lvl="2"/>
+            <a:r>
+              <a:rPr lang="en-US" smtClean="0"/>
+              <a:t>Third level</a:t>
+            </a:r>
+          </a:p>
+          <a:p>
+            <a:pPr lvl="3"/>
+            <a:r>
+              <a:rPr lang="en-US" smtClean="0"/>
+              <a:t>Fourth level</a:t>
+            </a:r>
+          </a:p>
+          <a:p>
+            <a:pPr lvl="4"/>
+            <a:r>
+              <a:rPr lang="en-US" smtClean="0"/>
+              <a:t>Fifth level</a:t>
+            </a:r>
+            <a:endParaRPr lang="en-US"/>
+          </a:p>
+        </p:txBody>
+      </p:sp>
+      <p:sp>
+        <p:nvSpPr>
+          <p:cNvPr id="4" name="Date Placeholder 3"/>
+          <p:cNvSpPr>
+            <a:spLocks noGrp="1"/>
+          </p:cNvSpPr>
+          <p:nvPr>
+            <p:ph type="dt" sz="half" idx="10"/>
+          </p:nvPr>
+        </p:nvSpPr>
+        <p:spPr/>
+        <p:txBody>
+          <a:bodyPr/>
+          <a:lstStyle/>
+          <a:p>
+            <a:fld id="{45253105-6222-E44C-A3C9-B345BB2DB333}" type="datetimeFigureOut">
+              <a:rPr lang="en-US" smtClean="0"/>
+              <a:pPr/>
+              <a:t>6/20/14</a:t>
+            </a:fld>
+            <a:endParaRPr lang="en-US"/>
+          </a:p>
+        </p:txBody>
+      </p:sp>
+      <p:sp>
+        <p:nvSpPr>
+          <p:cNvPr id="5" name="Footer Placeholder 4"/>
+          <p:cNvSpPr>
+            <a:spLocks noGrp="1"/>
+          </p:cNvSpPr>
+          <p:nvPr>
+            <p:ph type="ftr" sz="quarter" idx="11"/>
+          </p:nvPr>
+        </p:nvSpPr>
+        <p:spPr/>
+        <p:txBody>
+          <a:bodyPr/>
+          <a:lstStyle/>
+          <a:p>
+            <a:endParaRPr lang="en-US"/>
+          </a:p>
+        </p:txBody>
+      </p:sp>
+      <p:sp>
+        <p:nvSpPr>
+          <p:cNvPr id="6" name="Slide Number Placeholder 5"/>
+          <p:cNvSpPr>
+            <a:spLocks noGrp="1"/>
+          </p:cNvSpPr>
+          <p:nvPr>
+            <p:ph type="sldNum" sz="quarter" idx="12"/>
+          </p:nvPr>
+        </p:nvSpPr>
+        <p:spPr/>
+        <p:txBody>
+          <a:bodyPr/>
+          <a:lstStyle/>
+          <a:p>
+            <a:fld id="{A399DE09-9C7D-4B4C-A05E-F50BAD98C8AA}" type="slidenum">
+              <a:rPr lang="en-US" smtClean="0"/>
+              <a:pPr/>
+              <a:t>‹#›</a:t>
+            </a:fld>
+            <a:endParaRPr lang="en-US"/>
+          </a:p>
+        </p:txBody>
+      </p:sp>
+    </p:spTree>
+  </p:cSld>
+  <p:clrMapOvr>
+    <a:masterClrMapping/>
+  </p:clrMapOvr>
+</p:sldLayout>
+</file>
+
+<file path=ppt/slideLayouts/slideLayout2.xml><?xml version="1.0" encoding="utf-8"?>
+<p:sldLayout xmlns:a="http://schemas.openxmlformats.org/drawingml/2006/main" xmlns:r="http://schemas.openxmlformats.org/officeDocument/2006/relationships" xmlns:mc="http://schemas.openxmlformats.org/markup-compatibility/2006" xmlns:mv="urn:schemas-microsoft-com:mac:vml" xmlns:p="http://schemas.openxmlformats.org/presentationml/2006/main" mc:Ignorable="mv" mc:PreserveAttributes="mv:*" type="obj" preserve="1">
+  <p:cSld name="Title and Content">
+    <p:spTree>
+      <p:nvGrpSpPr>
+        <p:cNvPr id="1" name=""/>
+        <p:cNvGrpSpPr/>
+        <p:nvPr/>
+      </p:nvGrpSpPr>
+      <p:grpSpPr>
+        <a:xfrm>
+          <a:off x="0" y="0"/>
+          <a:ext cx="0" cy="0"/>
+          <a:chOff x="0" y="0"/>
+          <a:chExt cx="0" cy="0"/>
+        </a:xfrm>
+      </p:grpSpPr>
+      <p:sp>
+        <p:nvSpPr>
+          <p:cNvPr id="2" name="Title 1"/>
+          <p:cNvSpPr>
+            <a:spLocks noGrp="1"/>
+          </p:cNvSpPr>
+          <p:nvPr>
+            <p:ph type="title"/>
+          </p:nvPr>
+        </p:nvSpPr>
+        <p:spPr/>
+        <p:txBody>
+          <a:bodyPr/>
+          <a:lstStyle/>
+          <a:p>
+            <a:r>
+              <a:rPr lang="en-US" smtClean="0"/>
+              <a:t>Click to edit Master title style</a:t>
+            </a:r>
+            <a:endParaRPr lang="en-US"/>
+          </a:p>
+        </p:txBody>
+      </p:sp>
+      <p:sp>
+        <p:nvSpPr>
+          <p:cNvPr id="3" name="Content Placeholder 2"/>
+          <p:cNvSpPr>
+            <a:spLocks noGrp="1"/>
+          </p:cNvSpPr>
+          <p:nvPr>
+            <p:ph idx="1"/>
+          </p:nvPr>
+        </p:nvSpPr>
+        <p:spPr/>
+        <p:txBody>
+          <a:bodyPr/>
+          <a:lstStyle/>
+          <a:p>
+            <a:pPr lvl="0"/>
+            <a:r>
+              <a:rPr lang="en-US" smtClean="0"/>
+              <a:t>Click to edit Master text styles</a:t>
+            </a:r>
+          </a:p>
+          <a:p>
+            <a:pPr lvl="1"/>
+            <a:r>
+              <a:rPr lang="en-US" smtClean="0"/>
+              <a:t>Second level</a:t>
+            </a:r>
+          </a:p>
+          <a:p>
+            <a:pPr lvl="2"/>
+            <a:r>
+              <a:rPr lang="en-US" smtClean="0"/>
+              <a:t>Third level</a:t>
+            </a:r>
+          </a:p>
+          <a:p>
+            <a:pPr lvl="3"/>
+            <a:r>
+              <a:rPr lang="en-US" smtClean="0"/>
+              <a:t>Fourth level</a:t>
+            </a:r>
+          </a:p>
+          <a:p>
+            <a:pPr lvl="4"/>
+            <a:r>
+              <a:rPr lang="en-US" smtClean="0"/>
+              <a:t>Fifth level</a:t>
+            </a:r>
+            <a:endParaRPr lang="en-US"/>
+          </a:p>
+        </p:txBody>
+      </p:sp>
+      <p:sp>
+        <p:nvSpPr>
+          <p:cNvPr id="4" name="Date Placeholder 3"/>
+          <p:cNvSpPr>
+            <a:spLocks noGrp="1"/>
+          </p:cNvSpPr>
+          <p:nvPr>
+            <p:ph type="dt" sz="half" idx="10"/>
+          </p:nvPr>
+        </p:nvSpPr>
+        <p:spPr/>
+        <p:txBody>
+          <a:bodyPr/>
+          <a:lstStyle/>
+          <a:p>
+            <a:fld id="{45253105-6222-E44C-A3C9-B345BB2DB333}" type="datetimeFigureOut">
+              <a:rPr lang="en-US" smtClean="0"/>
+              <a:pPr/>
+              <a:t>6/20/14</a:t>
+            </a:fld>
+            <a:endParaRPr lang="en-US"/>
+          </a:p>
+        </p:txBody>
+      </p:sp>
+      <p:sp>
+        <p:nvSpPr>
+          <p:cNvPr id="5" name="Footer Placeholder 4"/>
+          <p:cNvSpPr>
+            <a:spLocks noGrp="1"/>
+          </p:cNvSpPr>
+          <p:nvPr>
+            <p:ph type="ftr" sz="quarter" idx="11"/>
+          </p:nvPr>
+        </p:nvSpPr>
+        <p:spPr/>
+        <p:txBody>
+          <a:bodyPr/>
+          <a:lstStyle/>
+          <a:p>
+            <a:endParaRPr lang="en-US"/>
+          </a:p>
+        </p:txBody>
+      </p:sp>
+      <p:sp>
+        <p:nvSpPr>
+          <p:cNvPr id="6" name="Slide Number Placeholder 5"/>
+          <p:cNvSpPr>
+            <a:spLocks noGrp="1"/>
+          </p:cNvSpPr>
+          <p:nvPr>
+            <p:ph type="sldNum" sz="quarter" idx="12"/>
+          </p:nvPr>
+        </p:nvSpPr>
+        <p:spPr/>
+        <p:txBody>
+          <a:bodyPr/>
+          <a:lstStyle/>
+          <a:p>
+            <a:fld id="{A399DE09-9C7D-4B4C-A05E-F50BAD98C8AA}" type="slidenum">
+              <a:rPr lang="en-US" smtClean="0"/>
+              <a:pPr/>
+              <a:t>‹#›</a:t>
+            </a:fld>
+            <a:endParaRPr lang="en-US"/>
+          </a:p>
+        </p:txBody>
+      </p:sp>
+    </p:spTree>
+  </p:cSld>
+  <p:clrMapOvr>
+    <a:masterClrMapping/>
+  </p:clrMapOvr>
+</p:sldLayout>
+</file>
+
+<file path=ppt/slideLayouts/slideLayout3.xml><?xml version="1.0" encoding="utf-8"?>
+<p:sldLayout xmlns:a="http://schemas.openxmlformats.org/drawingml/2006/main" xmlns:r="http://schemas.openxmlformats.org/officeDocument/2006/relationships" xmlns:mc="http://schemas.openxmlformats.org/markup-compatibility/2006" xmlns:mv="urn:schemas-microsoft-com:mac:vml" xmlns:p="http://schemas.openxmlformats.org/presentationml/2006/main" mc:Ignorable="mv" mc:PreserveAttributes="mv:*" type="secHead" preserve="1">
+  <p:cSld name="Section Header">
+    <p:spTree>
+      <p:nvGrpSpPr>
+        <p:cNvPr id="1" name=""/>
+        <p:cNvGrpSpPr/>
+        <p:nvPr/>
+      </p:nvGrpSpPr>
+      <p:grpSpPr>
+        <a:xfrm>
+          <a:off x="0" y="0"/>
+          <a:ext cx="0" cy="0"/>
+          <a:chOff x="0" y="0"/>
+          <a:chExt cx="0" cy="0"/>
+        </a:xfrm>
+      </p:grpSpPr>
+      <p:sp>
+        <p:nvSpPr>
+          <p:cNvPr id="2" name="Title 1"/>
+          <p:cNvSpPr>
+            <a:spLocks noGrp="1"/>
+          </p:cNvSpPr>
+          <p:nvPr>
+            <p:ph type="title"/>
+          </p:nvPr>
+        </p:nvSpPr>
+        <p:spPr>
+          <a:xfrm>
+            <a:off x="722313" y="4406902"/>
+            <a:ext cx="7772400" cy="1362075"/>
+          </a:xfrm>
+        </p:spPr>
+        <p:txBody>
+          <a:bodyPr anchor="t"/>
+          <a:lstStyle>
+            <a:lvl1pPr algn="l">
+              <a:defRPr sz="4000" b="1" cap="all"/>
+            </a:lvl1pPr>
+          </a:lstStyle>
+          <a:p>
+            <a:r>
+              <a:rPr lang="en-US" smtClean="0"/>
+              <a:t>Click to edit Master title style</a:t>
+            </a:r>
+            <a:endParaRPr lang="en-US"/>
+          </a:p>
+        </p:txBody>
+      </p:sp>
+      <p:sp>
+        <p:nvSpPr>
+          <p:cNvPr id="3" name="Text Placeholder 2"/>
+          <p:cNvSpPr>
+            <a:spLocks noGrp="1"/>
+          </p:cNvSpPr>
+          <p:nvPr>
+            <p:ph type="body" idx="1"/>
+          </p:nvPr>
+        </p:nvSpPr>
+        <p:spPr>
+          <a:xfrm>
+            <a:off x="722313" y="2906713"/>
+            <a:ext cx="7772400" cy="1500187"/>
+          </a:xfrm>
+        </p:spPr>
+        <p:txBody>
+          <a:bodyPr anchor="b"/>
+          <a:lstStyle>
+            <a:lvl1pPr marL="0" indent="0">
+              <a:buNone/>
+              <a:defRPr sz="2000">
+                <a:solidFill>
+                  <a:schemeClr val="tx1">
+                    <a:tint val="75000"/>
+                  </a:schemeClr>
+                </a:solidFill>
+              </a:defRPr>
+            </a:lvl1pPr>
+            <a:lvl2pPr marL="457200" indent="0">
+              <a:buNone/>
+              <a:defRPr sz="1800">
+                <a:solidFill>
+                  <a:schemeClr val="tx1">
+                    <a:tint val="75000"/>
+                  </a:schemeClr>
+                </a:solidFill>
+              </a:defRPr>
+            </a:lvl2pPr>
+            <a:lvl3pPr marL="914400" indent="0">
+              <a:buNone/>
+              <a:defRPr sz="1600">
+                <a:solidFill>
+                  <a:schemeClr val="tx1">
+                    <a:tint val="75000"/>
+                  </a:schemeClr>
+                </a:solidFill>
+              </a:defRPr>
+            </a:lvl3pPr>
+            <a:lvl4pPr marL="1371600" indent="0">
+              <a:buNone/>
+              <a:defRPr sz="1400">
+                <a:solidFill>
+                  <a:schemeClr val="tx1">
+                    <a:tint val="75000"/>
+                  </a:schemeClr>
+                </a:solidFill>
+              </a:defRPr>
+            </a:lvl4pPr>
+            <a:lvl5pPr marL="1828800" indent="0">
+              <a:buNone/>
+              <a:defRPr sz="1400">
+                <a:solidFill>
+                  <a:schemeClr val="tx1">
+                    <a:tint val="75000"/>
+                  </a:schemeClr>
+                </a:solidFill>
+              </a:defRPr>
+            </a:lvl5pPr>
+            <a:lvl6pPr marL="2286000" indent="0">
+              <a:buNone/>
+              <a:defRPr sz="1400">
+                <a:solidFill>
+                  <a:schemeClr val="tx1">
+                    <a:tint val="75000"/>
+                  </a:schemeClr>
+                </a:solidFill>
+              </a:defRPr>
+            </a:lvl6pPr>
+            <a:lvl7pPr marL="2743200" indent="0">
+              <a:buNone/>
+              <a:defRPr sz="1400">
+                <a:solidFill>
+                  <a:schemeClr val="tx1">
+                    <a:tint val="75000"/>
+                  </a:schemeClr>
+                </a:solidFill>
+              </a:defRPr>
+            </a:lvl7pPr>
+            <a:lvl8pPr marL="3200400" indent="0">
+              <a:buNone/>
+              <a:defRPr sz="1400">
+                <a:solidFill>
+                  <a:schemeClr val="tx1">
+                    <a:tint val="75000"/>
+                  </a:schemeClr>
+                </a:solidFill>
+              </a:defRPr>
+            </a:lvl8pPr>
+            <a:lvl9pPr marL="3657600" indent="0">
+              <a:buNone/>
+              <a:defRPr sz="1400">
+                <a:solidFill>
+                  <a:schemeClr val="tx1">
+                    <a:tint val="75000"/>
+                  </a:schemeClr>
+                </a:solidFill>
+              </a:defRPr>
+            </a:lvl9pPr>
+          </a:lstStyle>
+          <a:p>
+            <a:pPr lvl="0"/>
+            <a:r>
+              <a:rPr lang="en-US" smtClean="0"/>
+              <a:t>Click to edit Master text styles</a:t>
+            </a:r>
+          </a:p>
+        </p:txBody>
+      </p:sp>
+      <p:sp>
+        <p:nvSpPr>
+          <p:cNvPr id="4" name="Date Placeholder 3"/>
+          <p:cNvSpPr>
+            <a:spLocks noGrp="1"/>
+          </p:cNvSpPr>
+          <p:nvPr>
+            <p:ph type="dt" sz="half" idx="10"/>
+          </p:nvPr>
+        </p:nvSpPr>
+        <p:spPr/>
+        <p:txBody>
+          <a:bodyPr/>
+          <a:lstStyle/>
+          <a:p>
+            <a:fld id="{45253105-6222-E44C-A3C9-B345BB2DB333}" type="datetimeFigureOut">
+              <a:rPr lang="en-US" smtClean="0"/>
+              <a:pPr/>
+              <a:t>6/20/14</a:t>
+            </a:fld>
+            <a:endParaRPr lang="en-US"/>
+          </a:p>
+        </p:txBody>
+      </p:sp>
+      <p:sp>
+        <p:nvSpPr>
+          <p:cNvPr id="5" name="Footer Placeholder 4"/>
+          <p:cNvSpPr>
+            <a:spLocks noGrp="1"/>
+          </p:cNvSpPr>
+          <p:nvPr>
+            <p:ph type="ftr" sz="quarter" idx="11"/>
+          </p:nvPr>
+        </p:nvSpPr>
+        <p:spPr/>
+        <p:txBody>
+          <a:bodyPr/>
+          <a:lstStyle/>
+          <a:p>
+            <a:endParaRPr lang="en-US"/>
+          </a:p>
+        </p:txBody>
+      </p:sp>
+      <p:sp>
+        <p:nvSpPr>
+          <p:cNvPr id="6" name="Slide Number Placeholder 5"/>
+          <p:cNvSpPr>
+            <a:spLocks noGrp="1"/>
+          </p:cNvSpPr>
+          <p:nvPr>
+            <p:ph type="sldNum" sz="quarter" idx="12"/>
+          </p:nvPr>
+        </p:nvSpPr>
+        <p:spPr/>
+        <p:txBody>
+          <a:bodyPr/>
+          <a:lstStyle/>
+          <a:p>
+            <a:fld id="{A399DE09-9C7D-4B4C-A05E-F50BAD98C8AA}" type="slidenum">
+              <a:rPr lang="en-US" smtClean="0"/>
+              <a:pPr/>
+              <a:t>‹#›</a:t>
+            </a:fld>
+            <a:endParaRPr lang="en-US"/>
+          </a:p>
+        </p:txBody>
+      </p:sp>
+    </p:spTree>
+  </p:cSld>
+  <p:clrMapOvr>
+    <a:masterClrMapping/>
+  </p:clrMapOvr>
+</p:sldLayout>
+</file>
+
 <file path=ppt/slideLayouts/slideLayout4.xml><?xml version="1.0" encoding="utf-8"?>
 <p:sldLayout xmlns:a="http://schemas.openxmlformats.org/drawingml/2006/main" xmlns:r="http://schemas.openxmlformats.org/officeDocument/2006/relationships" xmlns:mc="http://schemas.openxmlformats.org/markup-compatibility/2006" xmlns:mv="urn:schemas-microsoft-com:mac:vml" xmlns:p="http://schemas.openxmlformats.org/presentationml/2006/main" mc:Ignorable="mv" mc:PreserveAttributes="mv:*" type="twoObj" preserve="1">
   <p:cSld name="Two Content">
@@ -766,6 +1995,425 @@
       <p:sp>
         <p:nvSpPr>
           <p:cNvPr id="7" name="Slide Number Placeholder 6"/>
+          <p:cNvSpPr>
+            <a:spLocks noGrp="1"/>
+          </p:cNvSpPr>
+          <p:nvPr>
+            <p:ph type="sldNum" sz="quarter" idx="12"/>
+          </p:nvPr>
+        </p:nvSpPr>
+        <p:spPr/>
+        <p:txBody>
+          <a:bodyPr/>
+          <a:lstStyle/>
+          <a:p>
+            <a:fld id="{A399DE09-9C7D-4B4C-A05E-F50BAD98C8AA}" type="slidenum">
+              <a:rPr lang="en-US" smtClean="0"/>
+              <a:pPr/>
+              <a:t>‹#›</a:t>
+            </a:fld>
+            <a:endParaRPr lang="en-US"/>
+          </a:p>
+        </p:txBody>
+      </p:sp>
+    </p:spTree>
+  </p:cSld>
+  <p:clrMapOvr>
+    <a:masterClrMapping/>
+  </p:clrMapOvr>
+</p:sldLayout>
+</file>
+
+<file path=ppt/slideLayouts/slideLayout5.xml><?xml version="1.0" encoding="utf-8"?>
+<p:sldLayout xmlns:a="http://schemas.openxmlformats.org/drawingml/2006/main" xmlns:r="http://schemas.openxmlformats.org/officeDocument/2006/relationships" xmlns:mc="http://schemas.openxmlformats.org/markup-compatibility/2006" xmlns:mv="urn:schemas-microsoft-com:mac:vml" xmlns:p="http://schemas.openxmlformats.org/presentationml/2006/main" mc:Ignorable="mv" mc:PreserveAttributes="mv:*" type="twoTxTwoObj" preserve="1">
+  <p:cSld name="Comparison">
+    <p:spTree>
+      <p:nvGrpSpPr>
+        <p:cNvPr id="1" name=""/>
+        <p:cNvGrpSpPr/>
+        <p:nvPr/>
+      </p:nvGrpSpPr>
+      <p:grpSpPr>
+        <a:xfrm>
+          <a:off x="0" y="0"/>
+          <a:ext cx="0" cy="0"/>
+          <a:chOff x="0" y="0"/>
+          <a:chExt cx="0" cy="0"/>
+        </a:xfrm>
+      </p:grpSpPr>
+      <p:sp>
+        <p:nvSpPr>
+          <p:cNvPr id="2" name="Title 1"/>
+          <p:cNvSpPr>
+            <a:spLocks noGrp="1"/>
+          </p:cNvSpPr>
+          <p:nvPr>
+            <p:ph type="title"/>
+          </p:nvPr>
+        </p:nvSpPr>
+        <p:spPr/>
+        <p:txBody>
+          <a:bodyPr/>
+          <a:lstStyle>
+            <a:lvl1pPr>
+              <a:defRPr/>
+            </a:lvl1pPr>
+          </a:lstStyle>
+          <a:p>
+            <a:r>
+              <a:rPr lang="en-US" smtClean="0"/>
+              <a:t>Click to edit Master title style</a:t>
+            </a:r>
+            <a:endParaRPr lang="en-US"/>
+          </a:p>
+        </p:txBody>
+      </p:sp>
+      <p:sp>
+        <p:nvSpPr>
+          <p:cNvPr id="3" name="Text Placeholder 2"/>
+          <p:cNvSpPr>
+            <a:spLocks noGrp="1"/>
+          </p:cNvSpPr>
+          <p:nvPr>
+            <p:ph type="body" idx="1"/>
+          </p:nvPr>
+        </p:nvSpPr>
+        <p:spPr>
+          <a:xfrm>
+            <a:off x="457200" y="1535113"/>
+            <a:ext cx="4040188" cy="639762"/>
+          </a:xfrm>
+        </p:spPr>
+        <p:txBody>
+          <a:bodyPr anchor="b"/>
+          <a:lstStyle>
+            <a:lvl1pPr marL="0" indent="0">
+              <a:buNone/>
+              <a:defRPr sz="2400" b="1"/>
+            </a:lvl1pPr>
+            <a:lvl2pPr marL="457200" indent="0">
+              <a:buNone/>
+              <a:defRPr sz="2000" b="1"/>
+            </a:lvl2pPr>
+            <a:lvl3pPr marL="914400" indent="0">
+              <a:buNone/>
+              <a:defRPr sz="1800" b="1"/>
+            </a:lvl3pPr>
+            <a:lvl4pPr marL="1371600" indent="0">
+              <a:buNone/>
+              <a:defRPr sz="1600" b="1"/>
+            </a:lvl4pPr>
+            <a:lvl5pPr marL="1828800" indent="0">
+              <a:buNone/>
+              <a:defRPr sz="1600" b="1"/>
+            </a:lvl5pPr>
+            <a:lvl6pPr marL="2286000" indent="0">
+              <a:buNone/>
+              <a:defRPr sz="1600" b="1"/>
+            </a:lvl6pPr>
+            <a:lvl7pPr marL="2743200" indent="0">
+              <a:buNone/>
+              <a:defRPr sz="1600" b="1"/>
+            </a:lvl7pPr>
+            <a:lvl8pPr marL="3200400" indent="0">
+              <a:buNone/>
+              <a:defRPr sz="1600" b="1"/>
+            </a:lvl8pPr>
+            <a:lvl9pPr marL="3657600" indent="0">
+              <a:buNone/>
+              <a:defRPr sz="1600" b="1"/>
+            </a:lvl9pPr>
+          </a:lstStyle>
+          <a:p>
+            <a:pPr lvl="0"/>
+            <a:r>
+              <a:rPr lang="en-US" smtClean="0"/>
+              <a:t>Click to edit Master text styles</a:t>
+            </a:r>
+          </a:p>
+        </p:txBody>
+      </p:sp>
+      <p:sp>
+        <p:nvSpPr>
+          <p:cNvPr id="4" name="Content Placeholder 3"/>
+          <p:cNvSpPr>
+            <a:spLocks noGrp="1"/>
+          </p:cNvSpPr>
+          <p:nvPr>
+            <p:ph sz="half" idx="2"/>
+          </p:nvPr>
+        </p:nvSpPr>
+        <p:spPr>
+          <a:xfrm>
+            <a:off x="457200" y="2174875"/>
+            <a:ext cx="4040188" cy="3951288"/>
+          </a:xfrm>
+        </p:spPr>
+        <p:txBody>
+          <a:bodyPr/>
+          <a:lstStyle>
+            <a:lvl1pPr>
+              <a:defRPr sz="2400"/>
+            </a:lvl1pPr>
+            <a:lvl2pPr>
+              <a:defRPr sz="2000"/>
+            </a:lvl2pPr>
+            <a:lvl3pPr>
+              <a:defRPr sz="1800"/>
+            </a:lvl3pPr>
+            <a:lvl4pPr>
+              <a:defRPr sz="1600"/>
+            </a:lvl4pPr>
+            <a:lvl5pPr>
+              <a:defRPr sz="1600"/>
+            </a:lvl5pPr>
+            <a:lvl6pPr>
+              <a:defRPr sz="1600"/>
+            </a:lvl6pPr>
+            <a:lvl7pPr>
+              <a:defRPr sz="1600"/>
+            </a:lvl7pPr>
+            <a:lvl8pPr>
+              <a:defRPr sz="1600"/>
+            </a:lvl8pPr>
+            <a:lvl9pPr>
+              <a:defRPr sz="1600"/>
+            </a:lvl9pPr>
+          </a:lstStyle>
+          <a:p>
+            <a:pPr lvl="0"/>
+            <a:r>
+              <a:rPr lang="en-US" smtClean="0"/>
+              <a:t>Click to edit Master text styles</a:t>
+            </a:r>
+          </a:p>
+          <a:p>
+            <a:pPr lvl="1"/>
+            <a:r>
+              <a:rPr lang="en-US" smtClean="0"/>
+              <a:t>Second level</a:t>
+            </a:r>
+          </a:p>
+          <a:p>
+            <a:pPr lvl="2"/>
+            <a:r>
+              <a:rPr lang="en-US" smtClean="0"/>
+              <a:t>Third level</a:t>
+            </a:r>
+          </a:p>
+          <a:p>
+            <a:pPr lvl="3"/>
+            <a:r>
+              <a:rPr lang="en-US" smtClean="0"/>
+              <a:t>Fourth level</a:t>
+            </a:r>
+          </a:p>
+          <a:p>
+            <a:pPr lvl="4"/>
+            <a:r>
+              <a:rPr lang="en-US" smtClean="0"/>
+              <a:t>Fifth level</a:t>
+            </a:r>
+            <a:endParaRPr lang="en-US"/>
+          </a:p>
+        </p:txBody>
+      </p:sp>
+      <p:sp>
+        <p:nvSpPr>
+          <p:cNvPr id="5" name="Text Placeholder 4"/>
+          <p:cNvSpPr>
+            <a:spLocks noGrp="1"/>
+          </p:cNvSpPr>
+          <p:nvPr>
+            <p:ph type="body" sz="quarter" idx="3"/>
+          </p:nvPr>
+        </p:nvSpPr>
+        <p:spPr>
+          <a:xfrm>
+            <a:off x="4645026" y="1535113"/>
+            <a:ext cx="4041775" cy="639762"/>
+          </a:xfrm>
+        </p:spPr>
+        <p:txBody>
+          <a:bodyPr anchor="b"/>
+          <a:lstStyle>
+            <a:lvl1pPr marL="0" indent="0">
+              <a:buNone/>
+              <a:defRPr sz="2400" b="1"/>
+            </a:lvl1pPr>
+            <a:lvl2pPr marL="457200" indent="0">
+              <a:buNone/>
+              <a:defRPr sz="2000" b="1"/>
+            </a:lvl2pPr>
+            <a:lvl3pPr marL="914400" indent="0">
+              <a:buNone/>
+              <a:defRPr sz="1800" b="1"/>
+            </a:lvl3pPr>
+            <a:lvl4pPr marL="1371600" indent="0">
+              <a:buNone/>
+              <a:defRPr sz="1600" b="1"/>
+            </a:lvl4pPr>
+            <a:lvl5pPr marL="1828800" indent="0">
+              <a:buNone/>
+              <a:defRPr sz="1600" b="1"/>
+            </a:lvl5pPr>
+            <a:lvl6pPr marL="2286000" indent="0">
+              <a:buNone/>
+              <a:defRPr sz="1600" b="1"/>
+            </a:lvl6pPr>
+            <a:lvl7pPr marL="2743200" indent="0">
+              <a:buNone/>
+              <a:defRPr sz="1600" b="1"/>
+            </a:lvl7pPr>
+            <a:lvl8pPr marL="3200400" indent="0">
+              <a:buNone/>
+              <a:defRPr sz="1600" b="1"/>
+            </a:lvl8pPr>
+            <a:lvl9pPr marL="3657600" indent="0">
+              <a:buNone/>
+              <a:defRPr sz="1600" b="1"/>
+            </a:lvl9pPr>
+          </a:lstStyle>
+          <a:p>
+            <a:pPr lvl="0"/>
+            <a:r>
+              <a:rPr lang="en-US" smtClean="0"/>
+              <a:t>Click to edit Master text styles</a:t>
+            </a:r>
+          </a:p>
+        </p:txBody>
+      </p:sp>
+      <p:sp>
+        <p:nvSpPr>
+          <p:cNvPr id="6" name="Content Placeholder 5"/>
+          <p:cNvSpPr>
+            <a:spLocks noGrp="1"/>
+          </p:cNvSpPr>
+          <p:nvPr>
+            <p:ph sz="quarter" idx="4"/>
+          </p:nvPr>
+        </p:nvSpPr>
+        <p:spPr>
+          <a:xfrm>
+            <a:off x="4645026" y="2174875"/>
+            <a:ext cx="4041775" cy="3951288"/>
+          </a:xfrm>
+        </p:spPr>
+        <p:txBody>
+          <a:bodyPr/>
+          <a:lstStyle>
+            <a:lvl1pPr>
+              <a:defRPr sz="2400"/>
+            </a:lvl1pPr>
+            <a:lvl2pPr>
+              <a:defRPr sz="2000"/>
+            </a:lvl2pPr>
+            <a:lvl3pPr>
+              <a:defRPr sz="1800"/>
+            </a:lvl3pPr>
+            <a:lvl4pPr>
+              <a:defRPr sz="1600"/>
+            </a:lvl4pPr>
+            <a:lvl5pPr>
+              <a:defRPr sz="1600"/>
+            </a:lvl5pPr>
+            <a:lvl6pPr>
+              <a:defRPr sz="1600"/>
+            </a:lvl6pPr>
+            <a:lvl7pPr>
+              <a:defRPr sz="1600"/>
+            </a:lvl7pPr>
+            <a:lvl8pPr>
+              <a:defRPr sz="1600"/>
+            </a:lvl8pPr>
+            <a:lvl9pPr>
+              <a:defRPr sz="1600"/>
+            </a:lvl9pPr>
+          </a:lstStyle>
+          <a:p>
+            <a:pPr lvl="0"/>
+            <a:r>
+              <a:rPr lang="en-US" smtClean="0"/>
+              <a:t>Click to edit Master text styles</a:t>
+            </a:r>
+          </a:p>
+          <a:p>
+            <a:pPr lvl="1"/>
+            <a:r>
+              <a:rPr lang="en-US" smtClean="0"/>
+              <a:t>Second level</a:t>
+            </a:r>
+          </a:p>
+          <a:p>
+            <a:pPr lvl="2"/>
+            <a:r>
+              <a:rPr lang="en-US" smtClean="0"/>
+              <a:t>Third level</a:t>
+            </a:r>
+          </a:p>
+          <a:p>
+            <a:pPr lvl="3"/>
+            <a:r>
+              <a:rPr lang="en-US" smtClean="0"/>
+              <a:t>Fourth level</a:t>
+            </a:r>
+          </a:p>
+          <a:p>
+            <a:pPr lvl="4"/>
+            <a:r>
+              <a:rPr lang="en-US" smtClean="0"/>
+              <a:t>Fifth level</a:t>
+            </a:r>
+            <a:endParaRPr lang="en-US"/>
+          </a:p>
+        </p:txBody>
+      </p:sp>
+      <p:sp>
+        <p:nvSpPr>
+          <p:cNvPr id="7" name="Date Placeholder 6"/>
+          <p:cNvSpPr>
+            <a:spLocks noGrp="1"/>
+          </p:cNvSpPr>
+          <p:nvPr>
+            <p:ph type="dt" sz="half" idx="10"/>
+          </p:nvPr>
+        </p:nvSpPr>
+        <p:spPr/>
+        <p:txBody>
+          <a:bodyPr/>
+          <a:lstStyle/>
+          <a:p>
+            <a:fld id="{45253105-6222-E44C-A3C9-B345BB2DB333}" type="datetimeFigureOut">
+              <a:rPr lang="en-US" smtClean="0"/>
+              <a:pPr/>
+              <a:t>6/20/14</a:t>
+            </a:fld>
+            <a:endParaRPr lang="en-US"/>
+          </a:p>
+        </p:txBody>
+      </p:sp>
+      <p:sp>
+        <p:nvSpPr>
+          <p:cNvPr id="8" name="Footer Placeholder 7"/>
+          <p:cNvSpPr>
+            <a:spLocks noGrp="1"/>
+          </p:cNvSpPr>
+          <p:nvPr>
+            <p:ph type="ftr" sz="quarter" idx="11"/>
+          </p:nvPr>
+        </p:nvSpPr>
+        <p:spPr/>
+        <p:txBody>
+          <a:bodyPr/>
+          <a:lstStyle/>
+          <a:p>
+            <a:endParaRPr lang="en-US"/>
+          </a:p>
+        </p:txBody>
+      </p:sp>
+      <p:sp>
+        <p:nvSpPr>
+          <p:cNvPr id="9" name="Slide Number Placeholder 8"/>
           <p:cNvSpPr>
             <a:spLocks noGrp="1"/>
           </p:cNvSpPr>
@@ -1274,6 +2922,2645 @@
     <a:masterClrMapping/>
   </p:clrMapOvr>
 </p:sldLayout>
+</file>
+
+<file path=ppt/slideLayouts/slideLayout9.xml><?xml version="1.0" encoding="utf-8"?>
+<p:sldLayout xmlns:a="http://schemas.openxmlformats.org/drawingml/2006/main" xmlns:r="http://schemas.openxmlformats.org/officeDocument/2006/relationships" xmlns:mc="http://schemas.openxmlformats.org/markup-compatibility/2006" xmlns:mv="urn:schemas-microsoft-com:mac:vml" xmlns:p="http://schemas.openxmlformats.org/presentationml/2006/main" mc:Ignorable="mv" mc:PreserveAttributes="mv:*" type="picTx" preserve="1">
+  <p:cSld name="Picture with Caption">
+    <p:spTree>
+      <p:nvGrpSpPr>
+        <p:cNvPr id="1" name=""/>
+        <p:cNvGrpSpPr/>
+        <p:nvPr/>
+      </p:nvGrpSpPr>
+      <p:grpSpPr>
+        <a:xfrm>
+          <a:off x="0" y="0"/>
+          <a:ext cx="0" cy="0"/>
+          <a:chOff x="0" y="0"/>
+          <a:chExt cx="0" cy="0"/>
+        </a:xfrm>
+      </p:grpSpPr>
+      <p:sp>
+        <p:nvSpPr>
+          <p:cNvPr id="2" name="Title 1"/>
+          <p:cNvSpPr>
+            <a:spLocks noGrp="1"/>
+          </p:cNvSpPr>
+          <p:nvPr>
+            <p:ph type="title"/>
+          </p:nvPr>
+        </p:nvSpPr>
+        <p:spPr>
+          <a:xfrm>
+            <a:off x="1792288" y="4800600"/>
+            <a:ext cx="5486400" cy="566738"/>
+          </a:xfrm>
+        </p:spPr>
+        <p:txBody>
+          <a:bodyPr anchor="b"/>
+          <a:lstStyle>
+            <a:lvl1pPr algn="l">
+              <a:defRPr sz="2000" b="1"/>
+            </a:lvl1pPr>
+          </a:lstStyle>
+          <a:p>
+            <a:r>
+              <a:rPr lang="en-US" smtClean="0"/>
+              <a:t>Click to edit Master title style</a:t>
+            </a:r>
+            <a:endParaRPr lang="en-US"/>
+          </a:p>
+        </p:txBody>
+      </p:sp>
+      <p:sp>
+        <p:nvSpPr>
+          <p:cNvPr id="3" name="Picture Placeholder 2"/>
+          <p:cNvSpPr>
+            <a:spLocks noGrp="1"/>
+          </p:cNvSpPr>
+          <p:nvPr>
+            <p:ph type="pic" idx="1"/>
+          </p:nvPr>
+        </p:nvSpPr>
+        <p:spPr>
+          <a:xfrm>
+            <a:off x="1792288" y="612775"/>
+            <a:ext cx="5486400" cy="4114800"/>
+          </a:xfrm>
+        </p:spPr>
+        <p:txBody>
+          <a:bodyPr/>
+          <a:lstStyle>
+            <a:lvl1pPr marL="0" indent="0">
+              <a:buNone/>
+              <a:defRPr sz="3200"/>
+            </a:lvl1pPr>
+            <a:lvl2pPr marL="457200" indent="0">
+              <a:buNone/>
+              <a:defRPr sz="2800"/>
+            </a:lvl2pPr>
+            <a:lvl3pPr marL="914400" indent="0">
+              <a:buNone/>
+              <a:defRPr sz="2400"/>
+            </a:lvl3pPr>
+            <a:lvl4pPr marL="1371600" indent="0">
+              <a:buNone/>
+              <a:defRPr sz="2000"/>
+            </a:lvl4pPr>
+            <a:lvl5pPr marL="1828800" indent="0">
+              <a:buNone/>
+              <a:defRPr sz="2000"/>
+            </a:lvl5pPr>
+            <a:lvl6pPr marL="2286000" indent="0">
+              <a:buNone/>
+              <a:defRPr sz="2000"/>
+            </a:lvl6pPr>
+            <a:lvl7pPr marL="2743200" indent="0">
+              <a:buNone/>
+              <a:defRPr sz="2000"/>
+            </a:lvl7pPr>
+            <a:lvl8pPr marL="3200400" indent="0">
+              <a:buNone/>
+              <a:defRPr sz="2000"/>
+            </a:lvl8pPr>
+            <a:lvl9pPr marL="3657600" indent="0">
+              <a:buNone/>
+              <a:defRPr sz="2000"/>
+            </a:lvl9pPr>
+          </a:lstStyle>
+          <a:p>
+            <a:endParaRPr lang="en-US"/>
+          </a:p>
+        </p:txBody>
+      </p:sp>
+      <p:sp>
+        <p:nvSpPr>
+          <p:cNvPr id="4" name="Text Placeholder 3"/>
+          <p:cNvSpPr>
+            <a:spLocks noGrp="1"/>
+          </p:cNvSpPr>
+          <p:nvPr>
+            <p:ph type="body" sz="half" idx="2"/>
+          </p:nvPr>
+        </p:nvSpPr>
+        <p:spPr>
+          <a:xfrm>
+            <a:off x="1792288" y="5367338"/>
+            <a:ext cx="5486400" cy="804862"/>
+          </a:xfrm>
+        </p:spPr>
+        <p:txBody>
+          <a:bodyPr/>
+          <a:lstStyle>
+            <a:lvl1pPr marL="0" indent="0">
+              <a:buNone/>
+              <a:defRPr sz="1400"/>
+            </a:lvl1pPr>
+            <a:lvl2pPr marL="457200" indent="0">
+              <a:buNone/>
+              <a:defRPr sz="1200"/>
+            </a:lvl2pPr>
+            <a:lvl3pPr marL="914400" indent="0">
+              <a:buNone/>
+              <a:defRPr sz="1000"/>
+            </a:lvl3pPr>
+            <a:lvl4pPr marL="1371600" indent="0">
+              <a:buNone/>
+              <a:defRPr sz="900"/>
+            </a:lvl4pPr>
+            <a:lvl5pPr marL="1828800" indent="0">
+              <a:buNone/>
+              <a:defRPr sz="900"/>
+            </a:lvl5pPr>
+            <a:lvl6pPr marL="2286000" indent="0">
+              <a:buNone/>
+              <a:defRPr sz="900"/>
+            </a:lvl6pPr>
+            <a:lvl7pPr marL="2743200" indent="0">
+              <a:buNone/>
+              <a:defRPr sz="900"/>
+            </a:lvl7pPr>
+            <a:lvl8pPr marL="3200400" indent="0">
+              <a:buNone/>
+              <a:defRPr sz="900"/>
+            </a:lvl8pPr>
+            <a:lvl9pPr marL="3657600" indent="0">
+              <a:buNone/>
+              <a:defRPr sz="900"/>
+            </a:lvl9pPr>
+          </a:lstStyle>
+          <a:p>
+            <a:pPr lvl="0"/>
+            <a:r>
+              <a:rPr lang="en-US" smtClean="0"/>
+              <a:t>Click to edit Master text styles</a:t>
+            </a:r>
+          </a:p>
+        </p:txBody>
+      </p:sp>
+      <p:sp>
+        <p:nvSpPr>
+          <p:cNvPr id="5" name="Date Placeholder 4"/>
+          <p:cNvSpPr>
+            <a:spLocks noGrp="1"/>
+          </p:cNvSpPr>
+          <p:nvPr>
+            <p:ph type="dt" sz="half" idx="10"/>
+          </p:nvPr>
+        </p:nvSpPr>
+        <p:spPr/>
+        <p:txBody>
+          <a:bodyPr/>
+          <a:lstStyle/>
+          <a:p>
+            <a:fld id="{45253105-6222-E44C-A3C9-B345BB2DB333}" type="datetimeFigureOut">
+              <a:rPr lang="en-US" smtClean="0"/>
+              <a:pPr/>
+              <a:t>6/20/14</a:t>
+            </a:fld>
+            <a:endParaRPr lang="en-US"/>
+          </a:p>
+        </p:txBody>
+      </p:sp>
+      <p:sp>
+        <p:nvSpPr>
+          <p:cNvPr id="6" name="Footer Placeholder 5"/>
+          <p:cNvSpPr>
+            <a:spLocks noGrp="1"/>
+          </p:cNvSpPr>
+          <p:nvPr>
+            <p:ph type="ftr" sz="quarter" idx="11"/>
+          </p:nvPr>
+        </p:nvSpPr>
+        <p:spPr/>
+        <p:txBody>
+          <a:bodyPr/>
+          <a:lstStyle/>
+          <a:p>
+            <a:endParaRPr lang="en-US"/>
+          </a:p>
+        </p:txBody>
+      </p:sp>
+      <p:sp>
+        <p:nvSpPr>
+          <p:cNvPr id="7" name="Slide Number Placeholder 6"/>
+          <p:cNvSpPr>
+            <a:spLocks noGrp="1"/>
+          </p:cNvSpPr>
+          <p:nvPr>
+            <p:ph type="sldNum" sz="quarter" idx="12"/>
+          </p:nvPr>
+        </p:nvSpPr>
+        <p:spPr/>
+        <p:txBody>
+          <a:bodyPr/>
+          <a:lstStyle/>
+          <a:p>
+            <a:fld id="{A399DE09-9C7D-4B4C-A05E-F50BAD98C8AA}" type="slidenum">
+              <a:rPr lang="en-US" smtClean="0"/>
+              <a:pPr/>
+              <a:t>‹#›</a:t>
+            </a:fld>
+            <a:endParaRPr lang="en-US"/>
+          </a:p>
+        </p:txBody>
+      </p:sp>
+    </p:spTree>
+  </p:cSld>
+  <p:clrMapOvr>
+    <a:masterClrMapping/>
+  </p:clrMapOvr>
+</p:sldLayout>
+</file>
+
+<file path=ppt/slideMasters/slideMaster1.xml><?xml version="1.0" encoding="utf-8"?>
+<p:sldMaster xmlns:a="http://schemas.openxmlformats.org/drawingml/2006/main" xmlns:r="http://schemas.openxmlformats.org/officeDocument/2006/relationships" xmlns:mc="http://schemas.openxmlformats.org/markup-compatibility/2006" xmlns:mv="urn:schemas-microsoft-com:mac:vml" xmlns:p="http://schemas.openxmlformats.org/presentationml/2006/main" mc:Ignorable="mv" mc:PreserveAttributes="mv:*">
+  <p:cSld>
+    <p:bg>
+      <p:bgRef idx="1001">
+        <a:schemeClr val="bg1"/>
+      </p:bgRef>
+    </p:bg>
+    <p:spTree>
+      <p:nvGrpSpPr>
+        <p:cNvPr id="1" name=""/>
+        <p:cNvGrpSpPr/>
+        <p:nvPr/>
+      </p:nvGrpSpPr>
+      <p:grpSpPr>
+        <a:xfrm>
+          <a:off x="0" y="0"/>
+          <a:ext cx="0" cy="0"/>
+          <a:chOff x="0" y="0"/>
+          <a:chExt cx="0" cy="0"/>
+        </a:xfrm>
+      </p:grpSpPr>
+      <p:sp>
+        <p:nvSpPr>
+          <p:cNvPr id="2" name="Title Placeholder 1"/>
+          <p:cNvSpPr>
+            <a:spLocks noGrp="1"/>
+          </p:cNvSpPr>
+          <p:nvPr>
+            <p:ph type="title"/>
+          </p:nvPr>
+        </p:nvSpPr>
+        <p:spPr>
+          <a:xfrm>
+            <a:off x="457200" y="274638"/>
+            <a:ext cx="8229600" cy="1143000"/>
+          </a:xfrm>
+          <a:prstGeom prst="rect">
+            <a:avLst/>
+          </a:prstGeom>
+        </p:spPr>
+        <p:txBody>
+          <a:bodyPr vert="horz" lIns="91440" tIns="45720" rIns="91440" bIns="45720" rtlCol="0" anchor="ctr">
+            <a:normAutofit/>
+          </a:bodyPr>
+          <a:lstStyle/>
+          <a:p>
+            <a:r>
+              <a:rPr lang="en-US" smtClean="0"/>
+              <a:t>Click to edit Master title style</a:t>
+            </a:r>
+            <a:endParaRPr lang="en-US"/>
+          </a:p>
+        </p:txBody>
+      </p:sp>
+      <p:sp>
+        <p:nvSpPr>
+          <p:cNvPr id="3" name="Text Placeholder 2"/>
+          <p:cNvSpPr>
+            <a:spLocks noGrp="1"/>
+          </p:cNvSpPr>
+          <p:nvPr>
+            <p:ph type="body" idx="1"/>
+          </p:nvPr>
+        </p:nvSpPr>
+        <p:spPr>
+          <a:xfrm>
+            <a:off x="457200" y="1600202"/>
+            <a:ext cx="8229600" cy="4525963"/>
+          </a:xfrm>
+          <a:prstGeom prst="rect">
+            <a:avLst/>
+          </a:prstGeom>
+        </p:spPr>
+        <p:txBody>
+          <a:bodyPr vert="horz" lIns="91440" tIns="45720" rIns="91440" bIns="45720" rtlCol="0">
+            <a:normAutofit/>
+          </a:bodyPr>
+          <a:lstStyle/>
+          <a:p>
+            <a:pPr lvl="0"/>
+            <a:r>
+              <a:rPr lang="en-US" smtClean="0"/>
+              <a:t>Click to edit Master text styles</a:t>
+            </a:r>
+          </a:p>
+          <a:p>
+            <a:pPr lvl="1"/>
+            <a:r>
+              <a:rPr lang="en-US" smtClean="0"/>
+              <a:t>Second level</a:t>
+            </a:r>
+          </a:p>
+          <a:p>
+            <a:pPr lvl="2"/>
+            <a:r>
+              <a:rPr lang="en-US" smtClean="0"/>
+              <a:t>Third level</a:t>
+            </a:r>
+          </a:p>
+          <a:p>
+            <a:pPr lvl="3"/>
+            <a:r>
+              <a:rPr lang="en-US" smtClean="0"/>
+              <a:t>Fourth level</a:t>
+            </a:r>
+          </a:p>
+          <a:p>
+            <a:pPr lvl="4"/>
+            <a:r>
+              <a:rPr lang="en-US" smtClean="0"/>
+              <a:t>Fifth level</a:t>
+            </a:r>
+            <a:endParaRPr lang="en-US"/>
+          </a:p>
+        </p:txBody>
+      </p:sp>
+      <p:sp>
+        <p:nvSpPr>
+          <p:cNvPr id="4" name="Date Placeholder 3"/>
+          <p:cNvSpPr>
+            <a:spLocks noGrp="1"/>
+          </p:cNvSpPr>
+          <p:nvPr>
+            <p:ph type="dt" sz="half" idx="2"/>
+          </p:nvPr>
+        </p:nvSpPr>
+        <p:spPr>
+          <a:xfrm>
+            <a:off x="457200" y="6356352"/>
+            <a:ext cx="2133600" cy="365125"/>
+          </a:xfrm>
+          <a:prstGeom prst="rect">
+            <a:avLst/>
+          </a:prstGeom>
+        </p:spPr>
+        <p:txBody>
+          <a:bodyPr vert="horz" lIns="91440" tIns="45720" rIns="91440" bIns="45720" rtlCol="0" anchor="ctr"/>
+          <a:lstStyle>
+            <a:lvl1pPr algn="l">
+              <a:defRPr sz="1200">
+                <a:solidFill>
+                  <a:schemeClr val="tx1">
+                    <a:tint val="75000"/>
+                  </a:schemeClr>
+                </a:solidFill>
+              </a:defRPr>
+            </a:lvl1pPr>
+          </a:lstStyle>
+          <a:p>
+            <a:fld id="{45253105-6222-E44C-A3C9-B345BB2DB333}" type="datetimeFigureOut">
+              <a:rPr lang="en-US" smtClean="0"/>
+              <a:pPr/>
+              <a:t>6/20/14</a:t>
+            </a:fld>
+            <a:endParaRPr lang="en-US"/>
+          </a:p>
+        </p:txBody>
+      </p:sp>
+      <p:sp>
+        <p:nvSpPr>
+          <p:cNvPr id="5" name="Footer Placeholder 4"/>
+          <p:cNvSpPr>
+            <a:spLocks noGrp="1"/>
+          </p:cNvSpPr>
+          <p:nvPr>
+            <p:ph type="ftr" sz="quarter" idx="3"/>
+          </p:nvPr>
+        </p:nvSpPr>
+        <p:spPr>
+          <a:xfrm>
+            <a:off x="3124200" y="6356352"/>
+            <a:ext cx="2895600" cy="365125"/>
+          </a:xfrm>
+          <a:prstGeom prst="rect">
+            <a:avLst/>
+          </a:prstGeom>
+        </p:spPr>
+        <p:txBody>
+          <a:bodyPr vert="horz" lIns="91440" tIns="45720" rIns="91440" bIns="45720" rtlCol="0" anchor="ctr"/>
+          <a:lstStyle>
+            <a:lvl1pPr algn="ctr">
+              <a:defRPr sz="1200">
+                <a:solidFill>
+                  <a:schemeClr val="tx1">
+                    <a:tint val="75000"/>
+                  </a:schemeClr>
+                </a:solidFill>
+              </a:defRPr>
+            </a:lvl1pPr>
+          </a:lstStyle>
+          <a:p>
+            <a:endParaRPr lang="en-US"/>
+          </a:p>
+        </p:txBody>
+      </p:sp>
+      <p:sp>
+        <p:nvSpPr>
+          <p:cNvPr id="6" name="Slide Number Placeholder 5"/>
+          <p:cNvSpPr>
+            <a:spLocks noGrp="1"/>
+          </p:cNvSpPr>
+          <p:nvPr>
+            <p:ph type="sldNum" sz="quarter" idx="4"/>
+          </p:nvPr>
+        </p:nvSpPr>
+        <p:spPr>
+          <a:xfrm>
+            <a:off x="6553200" y="6356352"/>
+            <a:ext cx="2133600" cy="365125"/>
+          </a:xfrm>
+          <a:prstGeom prst="rect">
+            <a:avLst/>
+          </a:prstGeom>
+        </p:spPr>
+        <p:txBody>
+          <a:bodyPr vert="horz" lIns="91440" tIns="45720" rIns="91440" bIns="45720" rtlCol="0" anchor="ctr"/>
+          <a:lstStyle>
+            <a:lvl1pPr algn="r">
+              <a:defRPr sz="1200">
+                <a:solidFill>
+                  <a:schemeClr val="tx1">
+                    <a:tint val="75000"/>
+                  </a:schemeClr>
+                </a:solidFill>
+              </a:defRPr>
+            </a:lvl1pPr>
+          </a:lstStyle>
+          <a:p>
+            <a:fld id="{A399DE09-9C7D-4B4C-A05E-F50BAD98C8AA}" type="slidenum">
+              <a:rPr lang="en-US" smtClean="0"/>
+              <a:pPr/>
+              <a:t>‹#›</a:t>
+            </a:fld>
+            <a:endParaRPr lang="en-US"/>
+          </a:p>
+        </p:txBody>
+      </p:sp>
+    </p:spTree>
+  </p:cSld>
+  <p:clrMap bg1="lt1" tx1="dk1" bg2="lt2" tx2="dk2" accent1="accent1" accent2="accent2" accent3="accent3" accent4="accent4" accent5="accent5" accent6="accent6" hlink="hlink" folHlink="folHlink"/>
+  <p:sldLayoutIdLst>
+    <p:sldLayoutId r:id="rId1"/>
+    <p:sldLayoutId r:id="rId2"/>
+    <p:sldLayoutId r:id="rId3"/>
+    <p:sldLayoutId r:id="rId4"/>
+    <p:sldLayoutId r:id="rId5"/>
+    <p:sldLayoutId r:id="rId6"/>
+    <p:sldLayoutId r:id="rId7"/>
+    <p:sldLayoutId r:id="rId8"/>
+    <p:sldLayoutId r:id="rId9"/>
+    <p:sldLayoutId r:id="rId10"/>
+    <p:sldLayoutId r:id="rId11"/>
+  </p:sldLayoutIdLst>
+  <p:txStyles>
+    <p:titleStyle>
+      <a:lvl1pPr algn="ctr" defTabSz="457200" rtl="0" eaLnBrk="1" latinLnBrk="0" hangingPunct="1">
+        <a:spcBef>
+          <a:spcPct val="0"/>
+        </a:spcBef>
+        <a:buNone/>
+        <a:defRPr sz="4400" kern="1200">
+          <a:solidFill>
+            <a:schemeClr val="tx1"/>
+          </a:solidFill>
+          <a:latin typeface="+mj-lt"/>
+          <a:ea typeface="+mj-ea"/>
+          <a:cs typeface="+mj-cs"/>
+        </a:defRPr>
+      </a:lvl1pPr>
+    </p:titleStyle>
+    <p:bodyStyle>
+      <a:lvl1pPr marL="342900" indent="-342900" algn="l" defTabSz="457200" rtl="0" eaLnBrk="1" latinLnBrk="0" hangingPunct="1">
+        <a:spcBef>
+          <a:spcPct val="20000"/>
+        </a:spcBef>
+        <a:buFont typeface="Arial"/>
+        <a:buChar char="•"/>
+        <a:defRPr sz="3200" kern="1200">
+          <a:solidFill>
+            <a:schemeClr val="tx1"/>
+          </a:solidFill>
+          <a:latin typeface="+mn-lt"/>
+          <a:ea typeface="+mn-ea"/>
+          <a:cs typeface="+mn-cs"/>
+        </a:defRPr>
+      </a:lvl1pPr>
+      <a:lvl2pPr marL="742950" indent="-285750" algn="l" defTabSz="457200" rtl="0" eaLnBrk="1" latinLnBrk="0" hangingPunct="1">
+        <a:spcBef>
+          <a:spcPct val="20000"/>
+        </a:spcBef>
+        <a:buFont typeface="Arial"/>
+        <a:buChar char="–"/>
+        <a:defRPr sz="2800" kern="1200">
+          <a:solidFill>
+            <a:schemeClr val="tx1"/>
+          </a:solidFill>
+          <a:latin typeface="+mn-lt"/>
+          <a:ea typeface="+mn-ea"/>
+          <a:cs typeface="+mn-cs"/>
+        </a:defRPr>
+      </a:lvl2pPr>
+      <a:lvl3pPr marL="1143000" indent="-228600" algn="l" defTabSz="457200" rtl="0" eaLnBrk="1" latinLnBrk="0" hangingPunct="1">
+        <a:spcBef>
+          <a:spcPct val="20000"/>
+        </a:spcBef>
+        <a:buFont typeface="Arial"/>
+        <a:buChar char="•"/>
+        <a:defRPr sz="2400" kern="1200">
+          <a:solidFill>
+            <a:schemeClr val="tx1"/>
+          </a:solidFill>
+          <a:latin typeface="+mn-lt"/>
+          <a:ea typeface="+mn-ea"/>
+          <a:cs typeface="+mn-cs"/>
+        </a:defRPr>
+      </a:lvl3pPr>
+      <a:lvl4pPr marL="1600200" indent="-228600" algn="l" defTabSz="457200" rtl="0" eaLnBrk="1" latinLnBrk="0" hangingPunct="1">
+        <a:spcBef>
+          <a:spcPct val="20000"/>
+        </a:spcBef>
+        <a:buFont typeface="Arial"/>
+        <a:buChar char="–"/>
+        <a:defRPr sz="2000" kern="1200">
+          <a:solidFill>
+            <a:schemeClr val="tx1"/>
+          </a:solidFill>
+          <a:latin typeface="+mn-lt"/>
+          <a:ea typeface="+mn-ea"/>
+          <a:cs typeface="+mn-cs"/>
+        </a:defRPr>
+      </a:lvl4pPr>
+      <a:lvl5pPr marL="2057400" indent="-228600" algn="l" defTabSz="457200" rtl="0" eaLnBrk="1" latinLnBrk="0" hangingPunct="1">
+        <a:spcBef>
+          <a:spcPct val="20000"/>
+        </a:spcBef>
+        <a:buFont typeface="Arial"/>
+        <a:buChar char="»"/>
+        <a:defRPr sz="2000" kern="1200">
+          <a:solidFill>
+            <a:schemeClr val="tx1"/>
+          </a:solidFill>
+          <a:latin typeface="+mn-lt"/>
+          <a:ea typeface="+mn-ea"/>
+          <a:cs typeface="+mn-cs"/>
+        </a:defRPr>
+      </a:lvl5pPr>
+      <a:lvl6pPr marL="2514600" indent="-228600" algn="l" defTabSz="457200" rtl="0" eaLnBrk="1" latinLnBrk="0" hangingPunct="1">
+        <a:spcBef>
+          <a:spcPct val="20000"/>
+        </a:spcBef>
+        <a:buFont typeface="Arial"/>
+        <a:buChar char="•"/>
+        <a:defRPr sz="2000" kern="1200">
+          <a:solidFill>
+            <a:schemeClr val="tx1"/>
+          </a:solidFill>
+          <a:latin typeface="+mn-lt"/>
+          <a:ea typeface="+mn-ea"/>
+          <a:cs typeface="+mn-cs"/>
+        </a:defRPr>
+      </a:lvl6pPr>
+      <a:lvl7pPr marL="2971800" indent="-228600" algn="l" defTabSz="457200" rtl="0" eaLnBrk="1" latinLnBrk="0" hangingPunct="1">
+        <a:spcBef>
+          <a:spcPct val="20000"/>
+        </a:spcBef>
+        <a:buFont typeface="Arial"/>
+        <a:buChar char="•"/>
+        <a:defRPr sz="2000" kern="1200">
+          <a:solidFill>
+            <a:schemeClr val="tx1"/>
+          </a:solidFill>
+          <a:latin typeface="+mn-lt"/>
+          <a:ea typeface="+mn-ea"/>
+          <a:cs typeface="+mn-cs"/>
+        </a:defRPr>
+      </a:lvl7pPr>
+      <a:lvl8pPr marL="3429000" indent="-228600" algn="l" defTabSz="457200" rtl="0" eaLnBrk="1" latinLnBrk="0" hangingPunct="1">
+        <a:spcBef>
+          <a:spcPct val="20000"/>
+        </a:spcBef>
+        <a:buFont typeface="Arial"/>
+        <a:buChar char="•"/>
+        <a:defRPr sz="2000" kern="1200">
+          <a:solidFill>
+            <a:schemeClr val="tx1"/>
+          </a:solidFill>
+          <a:latin typeface="+mn-lt"/>
+          <a:ea typeface="+mn-ea"/>
+          <a:cs typeface="+mn-cs"/>
+        </a:defRPr>
+      </a:lvl8pPr>
+      <a:lvl9pPr marL="3886200" indent="-228600" algn="l" defTabSz="457200" rtl="0" eaLnBrk="1" latinLnBrk="0" hangingPunct="1">
+        <a:spcBef>
+          <a:spcPct val="20000"/>
+        </a:spcBef>
+        <a:buFont typeface="Arial"/>
+        <a:buChar char="•"/>
+        <a:defRPr sz="2000" kern="1200">
+          <a:solidFill>
+            <a:schemeClr val="tx1"/>
+          </a:solidFill>
+          <a:latin typeface="+mn-lt"/>
+          <a:ea typeface="+mn-ea"/>
+          <a:cs typeface="+mn-cs"/>
+        </a:defRPr>
+      </a:lvl9pPr>
+    </p:bodyStyle>
+    <p:otherStyle>
+      <a:defPPr>
+        <a:defRPr lang="en-US"/>
+      </a:defPPr>
+      <a:lvl1pPr marL="0" algn="l" defTabSz="457200" rtl="0" eaLnBrk="1" latinLnBrk="0" hangingPunct="1">
+        <a:defRPr sz="1800" kern="1200">
+          <a:solidFill>
+            <a:schemeClr val="tx1"/>
+          </a:solidFill>
+          <a:latin typeface="+mn-lt"/>
+          <a:ea typeface="+mn-ea"/>
+          <a:cs typeface="+mn-cs"/>
+        </a:defRPr>
+      </a:lvl1pPr>
+      <a:lvl2pPr marL="457200" algn="l" defTabSz="457200" rtl="0" eaLnBrk="1" latinLnBrk="0" hangingPunct="1">
+        <a:defRPr sz="1800" kern="1200">
+          <a:solidFill>
+            <a:schemeClr val="tx1"/>
+          </a:solidFill>
+          <a:latin typeface="+mn-lt"/>
+          <a:ea typeface="+mn-ea"/>
+          <a:cs typeface="+mn-cs"/>
+        </a:defRPr>
+      </a:lvl2pPr>
+      <a:lvl3pPr marL="914400" algn="l" defTabSz="457200" rtl="0" eaLnBrk="1" latinLnBrk="0" hangingPunct="1">
+        <a:defRPr sz="1800" kern="1200">
+          <a:solidFill>
+            <a:schemeClr val="tx1"/>
+          </a:solidFill>
+          <a:latin typeface="+mn-lt"/>
+          <a:ea typeface="+mn-ea"/>
+          <a:cs typeface="+mn-cs"/>
+        </a:defRPr>
+      </a:lvl3pPr>
+      <a:lvl4pPr marL="1371600" algn="l" defTabSz="457200" rtl="0" eaLnBrk="1" latinLnBrk="0" hangingPunct="1">
+        <a:defRPr sz="1800" kern="1200">
+          <a:solidFill>
+            <a:schemeClr val="tx1"/>
+          </a:solidFill>
+          <a:latin typeface="+mn-lt"/>
+          <a:ea typeface="+mn-ea"/>
+          <a:cs typeface="+mn-cs"/>
+        </a:defRPr>
+      </a:lvl4pPr>
+      <a:lvl5pPr marL="1828800" algn="l" defTabSz="457200" rtl="0" eaLnBrk="1" latinLnBrk="0" hangingPunct="1">
+        <a:defRPr sz="1800" kern="1200">
+          <a:solidFill>
+            <a:schemeClr val="tx1"/>
+          </a:solidFill>
+          <a:latin typeface="+mn-lt"/>
+          <a:ea typeface="+mn-ea"/>
+          <a:cs typeface="+mn-cs"/>
+        </a:defRPr>
+      </a:lvl5pPr>
+      <a:lvl6pPr marL="2286000" algn="l" defTabSz="457200" rtl="0" eaLnBrk="1" latinLnBrk="0" hangingPunct="1">
+        <a:defRPr sz="1800" kern="1200">
+          <a:solidFill>
+            <a:schemeClr val="tx1"/>
+          </a:solidFill>
+          <a:latin typeface="+mn-lt"/>
+          <a:ea typeface="+mn-ea"/>
+          <a:cs typeface="+mn-cs"/>
+        </a:defRPr>
+      </a:lvl6pPr>
+      <a:lvl7pPr marL="2743200" algn="l" defTabSz="457200" rtl="0" eaLnBrk="1" latinLnBrk="0" hangingPunct="1">
+        <a:defRPr sz="1800" kern="1200">
+          <a:solidFill>
+            <a:schemeClr val="tx1"/>
+          </a:solidFill>
+          <a:latin typeface="+mn-lt"/>
+          <a:ea typeface="+mn-ea"/>
+          <a:cs typeface="+mn-cs"/>
+        </a:defRPr>
+      </a:lvl7pPr>
+      <a:lvl8pPr marL="3200400" algn="l" defTabSz="457200" rtl="0" eaLnBrk="1" latinLnBrk="0" hangingPunct="1">
+        <a:defRPr sz="1800" kern="1200">
+          <a:solidFill>
+            <a:schemeClr val="tx1"/>
+          </a:solidFill>
+          <a:latin typeface="+mn-lt"/>
+          <a:ea typeface="+mn-ea"/>
+          <a:cs typeface="+mn-cs"/>
+        </a:defRPr>
+      </a:lvl8pPr>
+      <a:lvl9pPr marL="3657600" algn="l" defTabSz="457200" rtl="0" eaLnBrk="1" latinLnBrk="0" hangingPunct="1">
+        <a:defRPr sz="1800" kern="1200">
+          <a:solidFill>
+            <a:schemeClr val="tx1"/>
+          </a:solidFill>
+          <a:latin typeface="+mn-lt"/>
+          <a:ea typeface="+mn-ea"/>
+          <a:cs typeface="+mn-cs"/>
+        </a:defRPr>
+      </a:lvl9pPr>
+    </p:otherStyle>
+  </p:txStyles>
+</p:sldMaster>
+</file>
+
+<file path=ppt/slides/slide1.xml><?xml version="1.0" encoding="utf-8"?>
+<p:sld xmlns:a="http://schemas.openxmlformats.org/drawingml/2006/main" xmlns:r="http://schemas.openxmlformats.org/officeDocument/2006/relationships" xmlns:mc="http://schemas.openxmlformats.org/markup-compatibility/2006" xmlns:mv="urn:schemas-microsoft-com:mac:vml" xmlns:p="http://schemas.openxmlformats.org/presentationml/2006/main" mc:Ignorable="mv" mc:PreserveAttributes="mv:*">
+  <p:cSld>
+    <p:spTree>
+      <p:nvGrpSpPr>
+        <p:cNvPr id="1" name=""/>
+        <p:cNvGrpSpPr/>
+        <p:nvPr/>
+      </p:nvGrpSpPr>
+      <p:grpSpPr>
+        <a:xfrm>
+          <a:off x="0" y="0"/>
+          <a:ext cx="0" cy="0"/>
+          <a:chOff x="0" y="0"/>
+          <a:chExt cx="0" cy="0"/>
+        </a:xfrm>
+      </p:grpSpPr>
+      <p:cxnSp>
+        <p:nvCxnSpPr>
+          <p:cNvPr id="48" name="Straight Connector 47"/>
+          <p:cNvCxnSpPr/>
+          <p:nvPr/>
+        </p:nvCxnSpPr>
+        <p:spPr>
+          <a:xfrm rot="5400000">
+            <a:off x="7048747" y="3162053"/>
+            <a:ext cx="228600" cy="494"/>
+          </a:xfrm>
+          <a:prstGeom prst="line">
+            <a:avLst/>
+          </a:prstGeom>
+        </p:spPr>
+        <p:style>
+          <a:lnRef idx="2">
+            <a:schemeClr val="accent1"/>
+          </a:lnRef>
+          <a:fillRef idx="0">
+            <a:schemeClr val="accent1"/>
+          </a:fillRef>
+          <a:effectRef idx="1">
+            <a:schemeClr val="accent1"/>
+          </a:effectRef>
+          <a:fontRef idx="minor">
+            <a:schemeClr val="tx1"/>
+          </a:fontRef>
+        </p:style>
+      </p:cxnSp>
+      <p:cxnSp>
+        <p:nvCxnSpPr>
+          <p:cNvPr id="36" name="Straight Connector 35"/>
+          <p:cNvCxnSpPr/>
+          <p:nvPr/>
+        </p:nvCxnSpPr>
+        <p:spPr>
+          <a:xfrm rot="5400000">
+            <a:off x="4039520" y="4076575"/>
+            <a:ext cx="228600" cy="1840"/>
+          </a:xfrm>
+          <a:prstGeom prst="line">
+            <a:avLst/>
+          </a:prstGeom>
+        </p:spPr>
+        <p:style>
+          <a:lnRef idx="2">
+            <a:schemeClr val="accent1"/>
+          </a:lnRef>
+          <a:fillRef idx="0">
+            <a:schemeClr val="accent1"/>
+          </a:fillRef>
+          <a:effectRef idx="1">
+            <a:schemeClr val="accent1"/>
+          </a:effectRef>
+          <a:fontRef idx="minor">
+            <a:schemeClr val="tx1"/>
+          </a:fontRef>
+        </p:style>
+      </p:cxnSp>
+      <p:cxnSp>
+        <p:nvCxnSpPr>
+          <p:cNvPr id="16" name="Straight Connector 15"/>
+          <p:cNvCxnSpPr>
+            <a:stCxn id="8" idx="2"/>
+          </p:cNvCxnSpPr>
+          <p:nvPr/>
+        </p:nvCxnSpPr>
+        <p:spPr>
+          <a:xfrm rot="5400000">
+            <a:off x="2972497" y="3162698"/>
+            <a:ext cx="230188" cy="794"/>
+          </a:xfrm>
+          <a:prstGeom prst="line">
+            <a:avLst/>
+          </a:prstGeom>
+        </p:spPr>
+        <p:style>
+          <a:lnRef idx="2">
+            <a:schemeClr val="accent1"/>
+          </a:lnRef>
+          <a:fillRef idx="0">
+            <a:schemeClr val="accent1"/>
+          </a:fillRef>
+          <a:effectRef idx="1">
+            <a:schemeClr val="accent1"/>
+          </a:effectRef>
+          <a:fontRef idx="minor">
+            <a:schemeClr val="tx1"/>
+          </a:fontRef>
+        </p:style>
+      </p:cxnSp>
+      <p:cxnSp>
+        <p:nvCxnSpPr>
+          <p:cNvPr id="20" name="Straight Connector 19"/>
+          <p:cNvCxnSpPr>
+            <a:stCxn id="9" idx="2"/>
+          </p:cNvCxnSpPr>
+          <p:nvPr/>
+        </p:nvCxnSpPr>
+        <p:spPr>
+          <a:xfrm rot="5400000">
+            <a:off x="4343099" y="3162302"/>
+            <a:ext cx="228602" cy="1588"/>
+          </a:xfrm>
+          <a:prstGeom prst="line">
+            <a:avLst/>
+          </a:prstGeom>
+        </p:spPr>
+        <p:style>
+          <a:lnRef idx="2">
+            <a:schemeClr val="accent1"/>
+          </a:lnRef>
+          <a:fillRef idx="0">
+            <a:schemeClr val="accent1"/>
+          </a:fillRef>
+          <a:effectRef idx="1">
+            <a:schemeClr val="accent1"/>
+          </a:effectRef>
+          <a:fontRef idx="minor">
+            <a:schemeClr val="tx1"/>
+          </a:fontRef>
+        </p:style>
+      </p:cxnSp>
+      <p:cxnSp>
+        <p:nvCxnSpPr>
+          <p:cNvPr id="22" name="Straight Connector 21"/>
+          <p:cNvCxnSpPr>
+            <a:stCxn id="10" idx="2"/>
+          </p:cNvCxnSpPr>
+          <p:nvPr/>
+        </p:nvCxnSpPr>
+        <p:spPr>
+          <a:xfrm rot="5400000">
+            <a:off x="5714947" y="3162054"/>
+            <a:ext cx="228600" cy="494"/>
+          </a:xfrm>
+          <a:prstGeom prst="line">
+            <a:avLst/>
+          </a:prstGeom>
+        </p:spPr>
+        <p:style>
+          <a:lnRef idx="2">
+            <a:schemeClr val="accent1"/>
+          </a:lnRef>
+          <a:fillRef idx="0">
+            <a:schemeClr val="accent1"/>
+          </a:fillRef>
+          <a:effectRef idx="1">
+            <a:schemeClr val="accent1"/>
+          </a:effectRef>
+          <a:fontRef idx="minor">
+            <a:schemeClr val="tx1"/>
+          </a:fontRef>
+        </p:style>
+      </p:cxnSp>
+      <p:sp>
+        <p:nvSpPr>
+          <p:cNvPr id="5" name="Rectangle 4"/>
+          <p:cNvSpPr/>
+          <p:nvPr/>
+        </p:nvSpPr>
+        <p:spPr>
+          <a:xfrm>
+            <a:off x="990600" y="5689600"/>
+            <a:ext cx="6858600" cy="685800"/>
+          </a:xfrm>
+          <a:prstGeom prst="rect">
+            <a:avLst/>
+          </a:prstGeom>
+        </p:spPr>
+        <p:style>
+          <a:lnRef idx="3">
+            <a:schemeClr val="lt1"/>
+          </a:lnRef>
+          <a:fillRef idx="1">
+            <a:schemeClr val="accent4"/>
+          </a:fillRef>
+          <a:effectRef idx="1">
+            <a:schemeClr val="accent4"/>
+          </a:effectRef>
+          <a:fontRef idx="minor">
+            <a:schemeClr val="lt1"/>
+          </a:fontRef>
+        </p:style>
+        <p:txBody>
+          <a:bodyPr rtlCol="0" anchor="ctr"/>
+          <a:lstStyle/>
+          <a:p>
+            <a:pPr algn="ctr"/>
+            <a:r>
+              <a:rPr lang="en-US" dirty="0" smtClean="0"/>
+              <a:t>Bluetooth Single/Dual Mode Chipset</a:t>
+            </a:r>
+            <a:endParaRPr lang="en-US" dirty="0"/>
+          </a:p>
+        </p:txBody>
+      </p:sp>
+      <p:sp>
+        <p:nvSpPr>
+          <p:cNvPr id="6" name="Rectangle 5"/>
+          <p:cNvSpPr/>
+          <p:nvPr/>
+        </p:nvSpPr>
+        <p:spPr>
+          <a:xfrm>
+            <a:off x="990600" y="4191001"/>
+            <a:ext cx="6858600" cy="609600"/>
+          </a:xfrm>
+          <a:prstGeom prst="rect">
+            <a:avLst/>
+          </a:prstGeom>
+        </p:spPr>
+        <p:style>
+          <a:lnRef idx="3">
+            <a:schemeClr val="lt1"/>
+          </a:lnRef>
+          <a:fillRef idx="1">
+            <a:schemeClr val="accent1"/>
+          </a:fillRef>
+          <a:effectRef idx="1">
+            <a:schemeClr val="accent1"/>
+          </a:effectRef>
+          <a:fontRef idx="minor">
+            <a:schemeClr val="lt1"/>
+          </a:fontRef>
+        </p:style>
+        <p:txBody>
+          <a:bodyPr rtlCol="0" anchor="ctr"/>
+          <a:lstStyle/>
+          <a:p>
+            <a:pPr algn="ctr"/>
+            <a:r>
+              <a:rPr lang="en-US" dirty="0" smtClean="0"/>
+              <a:t>HCI</a:t>
+            </a:r>
+            <a:endParaRPr lang="en-US" dirty="0"/>
+          </a:p>
+        </p:txBody>
+      </p:sp>
+      <p:sp>
+        <p:nvSpPr>
+          <p:cNvPr id="7" name="Rectangle 6"/>
+          <p:cNvSpPr/>
+          <p:nvPr/>
+        </p:nvSpPr>
+        <p:spPr>
+          <a:xfrm>
+            <a:off x="990601" y="3276601"/>
+            <a:ext cx="4190400" cy="685800"/>
+          </a:xfrm>
+          <a:prstGeom prst="rect">
+            <a:avLst/>
+          </a:prstGeom>
+        </p:spPr>
+        <p:style>
+          <a:lnRef idx="3">
+            <a:schemeClr val="lt1"/>
+          </a:lnRef>
+          <a:fillRef idx="1">
+            <a:schemeClr val="accent1"/>
+          </a:fillRef>
+          <a:effectRef idx="1">
+            <a:schemeClr val="accent1"/>
+          </a:effectRef>
+          <a:fontRef idx="minor">
+            <a:schemeClr val="lt1"/>
+          </a:fontRef>
+        </p:style>
+        <p:txBody>
+          <a:bodyPr rtlCol="0" anchor="ctr"/>
+          <a:lstStyle/>
+          <a:p>
+            <a:pPr algn="ctr"/>
+            <a:r>
+              <a:rPr lang="en-US" dirty="0" smtClean="0"/>
+              <a:t>L2CAP</a:t>
+            </a:r>
+            <a:endParaRPr lang="en-US" dirty="0"/>
+          </a:p>
+        </p:txBody>
+      </p:sp>
+      <p:sp>
+        <p:nvSpPr>
+          <p:cNvPr id="8" name="Rectangle 7"/>
+          <p:cNvSpPr/>
+          <p:nvPr/>
+        </p:nvSpPr>
+        <p:spPr>
+          <a:xfrm>
+            <a:off x="2439988" y="2438401"/>
+            <a:ext cx="1296000" cy="609600"/>
+          </a:xfrm>
+          <a:prstGeom prst="rect">
+            <a:avLst/>
+          </a:prstGeom>
+        </p:spPr>
+        <p:style>
+          <a:lnRef idx="3">
+            <a:schemeClr val="lt1"/>
+          </a:lnRef>
+          <a:fillRef idx="1">
+            <a:schemeClr val="accent1"/>
+          </a:fillRef>
+          <a:effectRef idx="1">
+            <a:schemeClr val="accent1"/>
+          </a:effectRef>
+          <a:fontRef idx="minor">
+            <a:schemeClr val="lt1"/>
+          </a:fontRef>
+        </p:style>
+        <p:txBody>
+          <a:bodyPr rtlCol="0" anchor="ctr"/>
+          <a:lstStyle/>
+          <a:p>
+            <a:pPr algn="ctr"/>
+            <a:r>
+              <a:rPr lang="en-US" dirty="0" smtClean="0"/>
+              <a:t>SDP</a:t>
+            </a:r>
+            <a:endParaRPr lang="en-US" dirty="0"/>
+          </a:p>
+        </p:txBody>
+      </p:sp>
+      <p:sp>
+        <p:nvSpPr>
+          <p:cNvPr id="9" name="Rectangle 8"/>
+          <p:cNvSpPr/>
+          <p:nvPr/>
+        </p:nvSpPr>
+        <p:spPr>
+          <a:xfrm>
+            <a:off x="3809400" y="2438401"/>
+            <a:ext cx="1296000" cy="609600"/>
+          </a:xfrm>
+          <a:prstGeom prst="rect">
+            <a:avLst/>
+          </a:prstGeom>
+        </p:spPr>
+        <p:style>
+          <a:lnRef idx="3">
+            <a:schemeClr val="lt1"/>
+          </a:lnRef>
+          <a:fillRef idx="1">
+            <a:schemeClr val="accent1"/>
+          </a:fillRef>
+          <a:effectRef idx="1">
+            <a:schemeClr val="accent1"/>
+          </a:effectRef>
+          <a:fontRef idx="minor">
+            <a:schemeClr val="lt1"/>
+          </a:fontRef>
+        </p:style>
+        <p:txBody>
+          <a:bodyPr rtlCol="0" anchor="ctr"/>
+          <a:lstStyle/>
+          <a:p>
+            <a:pPr algn="ctr"/>
+            <a:r>
+              <a:rPr lang="en-US" dirty="0" smtClean="0"/>
+              <a:t>RFCOMM</a:t>
+            </a:r>
+            <a:endParaRPr lang="en-US" dirty="0"/>
+          </a:p>
+        </p:txBody>
+      </p:sp>
+      <p:sp>
+        <p:nvSpPr>
+          <p:cNvPr id="10" name="Rectangle 9"/>
+          <p:cNvSpPr/>
+          <p:nvPr/>
+        </p:nvSpPr>
+        <p:spPr>
+          <a:xfrm>
+            <a:off x="5181494" y="2438401"/>
+            <a:ext cx="1296000" cy="609600"/>
+          </a:xfrm>
+          <a:prstGeom prst="rect">
+            <a:avLst/>
+          </a:prstGeom>
+        </p:spPr>
+        <p:style>
+          <a:lnRef idx="3">
+            <a:schemeClr val="lt1"/>
+          </a:lnRef>
+          <a:fillRef idx="1">
+            <a:schemeClr val="accent3"/>
+          </a:fillRef>
+          <a:effectRef idx="1">
+            <a:schemeClr val="accent3"/>
+          </a:effectRef>
+          <a:fontRef idx="minor">
+            <a:schemeClr val="lt1"/>
+          </a:fontRef>
+        </p:style>
+        <p:txBody>
+          <a:bodyPr rtlCol="0" anchor="ctr"/>
+          <a:lstStyle/>
+          <a:p>
+            <a:pPr algn="ctr"/>
+            <a:r>
+              <a:rPr lang="en-US" dirty="0" smtClean="0"/>
+              <a:t>ATT</a:t>
+            </a:r>
+            <a:endParaRPr lang="en-US" dirty="0"/>
+          </a:p>
+        </p:txBody>
+      </p:sp>
+      <p:cxnSp>
+        <p:nvCxnSpPr>
+          <p:cNvPr id="13" name="Straight Connector 12"/>
+          <p:cNvCxnSpPr/>
+          <p:nvPr/>
+        </p:nvCxnSpPr>
+        <p:spPr>
+          <a:xfrm>
+            <a:off x="914400" y="5476320"/>
+            <a:ext cx="6984000" cy="1588"/>
+          </a:xfrm>
+          <a:prstGeom prst="line">
+            <a:avLst/>
+          </a:prstGeom>
+        </p:spPr>
+        <p:style>
+          <a:lnRef idx="2">
+            <a:schemeClr val="accent2"/>
+          </a:lnRef>
+          <a:fillRef idx="0">
+            <a:schemeClr val="accent2"/>
+          </a:fillRef>
+          <a:effectRef idx="1">
+            <a:schemeClr val="accent2"/>
+          </a:effectRef>
+          <a:fontRef idx="minor">
+            <a:schemeClr val="tx1"/>
+          </a:fontRef>
+        </p:style>
+      </p:cxnSp>
+      <p:sp>
+        <p:nvSpPr>
+          <p:cNvPr id="29" name="Rectangle 28"/>
+          <p:cNvSpPr/>
+          <p:nvPr/>
+        </p:nvSpPr>
+        <p:spPr>
+          <a:xfrm>
+            <a:off x="990600" y="4800601"/>
+            <a:ext cx="1324429" cy="457200"/>
+          </a:xfrm>
+          <a:prstGeom prst="rect">
+            <a:avLst/>
+          </a:prstGeom>
+        </p:spPr>
+        <p:style>
+          <a:lnRef idx="3">
+            <a:schemeClr val="lt1"/>
+          </a:lnRef>
+          <a:fillRef idx="1">
+            <a:schemeClr val="accent1"/>
+          </a:fillRef>
+          <a:effectRef idx="1">
+            <a:schemeClr val="accent1"/>
+          </a:effectRef>
+          <a:fontRef idx="minor">
+            <a:schemeClr val="lt1"/>
+          </a:fontRef>
+        </p:style>
+        <p:txBody>
+          <a:bodyPr rtlCol="0" anchor="ctr"/>
+          <a:lstStyle/>
+          <a:p>
+            <a:pPr algn="ctr"/>
+            <a:r>
+              <a:rPr lang="en-US" dirty="0" smtClean="0"/>
+              <a:t>H4 UART</a:t>
+            </a:r>
+            <a:endParaRPr lang="en-US" dirty="0"/>
+          </a:p>
+        </p:txBody>
+      </p:sp>
+      <p:sp>
+        <p:nvSpPr>
+          <p:cNvPr id="30" name="Rectangle 29"/>
+          <p:cNvSpPr/>
+          <p:nvPr/>
+        </p:nvSpPr>
+        <p:spPr>
+          <a:xfrm>
+            <a:off x="2555991" y="4811094"/>
+            <a:ext cx="1863609" cy="446707"/>
+          </a:xfrm>
+          <a:prstGeom prst="rect">
+            <a:avLst/>
+          </a:prstGeom>
+          <a:ln/>
+        </p:spPr>
+        <p:style>
+          <a:lnRef idx="3">
+            <a:schemeClr val="lt1"/>
+          </a:lnRef>
+          <a:fillRef idx="1">
+            <a:schemeClr val="accent1"/>
+          </a:fillRef>
+          <a:effectRef idx="1">
+            <a:schemeClr val="accent1"/>
+          </a:effectRef>
+          <a:fontRef idx="minor">
+            <a:schemeClr val="lt1"/>
+          </a:fontRef>
+        </p:style>
+        <p:txBody>
+          <a:bodyPr/>
+          <a:lstStyle/>
+          <a:p>
+            <a:pPr algn="ctr"/>
+            <a:r>
+              <a:rPr lang="en-US" dirty="0" err="1" smtClean="0"/>
+              <a:t>eHCILL</a:t>
+            </a:r>
+            <a:r>
+              <a:rPr lang="en-US" dirty="0" smtClean="0"/>
+              <a:t> UART </a:t>
+            </a:r>
+            <a:endParaRPr lang="en-US" dirty="0"/>
+          </a:p>
+        </p:txBody>
+      </p:sp>
+      <p:sp>
+        <p:nvSpPr>
+          <p:cNvPr id="32" name="Rectangle 31"/>
+          <p:cNvSpPr/>
+          <p:nvPr/>
+        </p:nvSpPr>
+        <p:spPr>
+          <a:xfrm>
+            <a:off x="6514763" y="4811094"/>
+            <a:ext cx="1333837" cy="446707"/>
+          </a:xfrm>
+          <a:prstGeom prst="rect">
+            <a:avLst/>
+          </a:prstGeom>
+          <a:ln/>
+        </p:spPr>
+        <p:style>
+          <a:lnRef idx="3">
+            <a:schemeClr val="lt1"/>
+          </a:lnRef>
+          <a:fillRef idx="1">
+            <a:schemeClr val="accent1"/>
+          </a:fillRef>
+          <a:effectRef idx="1">
+            <a:schemeClr val="accent1"/>
+          </a:effectRef>
+          <a:fontRef idx="minor">
+            <a:schemeClr val="lt1"/>
+          </a:fontRef>
+        </p:style>
+        <p:txBody>
+          <a:bodyPr/>
+          <a:lstStyle/>
+          <a:p>
+            <a:pPr algn="ctr"/>
+            <a:r>
+              <a:rPr lang="en-US" dirty="0" smtClean="0"/>
+              <a:t>USB</a:t>
+            </a:r>
+            <a:endParaRPr lang="en-US" dirty="0"/>
+          </a:p>
+        </p:txBody>
+      </p:sp>
+      <p:sp>
+        <p:nvSpPr>
+          <p:cNvPr id="33" name="TextBox 32"/>
+          <p:cNvSpPr txBox="1"/>
+          <p:nvPr/>
+        </p:nvSpPr>
+        <p:spPr>
+          <a:xfrm>
+            <a:off x="4871962" y="4888469"/>
+            <a:ext cx="1147838" cy="369332"/>
+          </a:xfrm>
+          <a:prstGeom prst="rect">
+            <a:avLst/>
+          </a:prstGeom>
+          <a:noFill/>
+        </p:spPr>
+        <p:txBody>
+          <a:bodyPr wrap="square" rtlCol="0">
+            <a:spAutoFit/>
+          </a:bodyPr>
+          <a:lstStyle/>
+          <a:p>
+            <a:pPr algn="ctr"/>
+            <a:r>
+              <a:rPr lang="en-US" dirty="0" smtClean="0"/>
+              <a:t>…</a:t>
+            </a:r>
+            <a:endParaRPr lang="en-US" dirty="0"/>
+          </a:p>
+        </p:txBody>
+      </p:sp>
+      <p:cxnSp>
+        <p:nvCxnSpPr>
+          <p:cNvPr id="19" name="Straight Connector 18"/>
+          <p:cNvCxnSpPr/>
+          <p:nvPr/>
+        </p:nvCxnSpPr>
+        <p:spPr>
+          <a:xfrm>
+            <a:off x="914400" y="2209800"/>
+            <a:ext cx="6984000" cy="1588"/>
+          </a:xfrm>
+          <a:prstGeom prst="line">
+            <a:avLst/>
+          </a:prstGeom>
+        </p:spPr>
+        <p:style>
+          <a:lnRef idx="2">
+            <a:schemeClr val="accent2"/>
+          </a:lnRef>
+          <a:fillRef idx="0">
+            <a:schemeClr val="accent2"/>
+          </a:fillRef>
+          <a:effectRef idx="1">
+            <a:schemeClr val="accent2"/>
+          </a:effectRef>
+          <a:fontRef idx="minor">
+            <a:schemeClr val="tx1"/>
+          </a:fontRef>
+        </p:style>
+      </p:cxnSp>
+      <p:sp>
+        <p:nvSpPr>
+          <p:cNvPr id="21" name="Rectangle 20"/>
+          <p:cNvSpPr/>
+          <p:nvPr/>
+        </p:nvSpPr>
+        <p:spPr>
+          <a:xfrm>
+            <a:off x="3809400" y="1371600"/>
+            <a:ext cx="1296000" cy="609600"/>
+          </a:xfrm>
+          <a:prstGeom prst="rect">
+            <a:avLst/>
+          </a:prstGeom>
+          <a:solidFill>
+            <a:schemeClr val="tx1">
+              <a:lumMod val="50000"/>
+              <a:lumOff val="50000"/>
+            </a:schemeClr>
+          </a:solidFill>
+        </p:spPr>
+        <p:style>
+          <a:lnRef idx="3">
+            <a:schemeClr val="lt1"/>
+          </a:lnRef>
+          <a:fillRef idx="1">
+            <a:schemeClr val="accent2"/>
+          </a:fillRef>
+          <a:effectRef idx="1">
+            <a:schemeClr val="accent2"/>
+          </a:effectRef>
+          <a:fontRef idx="minor">
+            <a:schemeClr val="lt1"/>
+          </a:fontRef>
+        </p:style>
+        <p:txBody>
+          <a:bodyPr rtlCol="0" anchor="ctr"/>
+          <a:lstStyle/>
+          <a:p>
+            <a:pPr algn="ctr"/>
+            <a:r>
+              <a:rPr lang="en-US" dirty="0" smtClean="0"/>
+              <a:t>SPP</a:t>
+            </a:r>
+            <a:endParaRPr lang="en-US" dirty="0"/>
+          </a:p>
+        </p:txBody>
+      </p:sp>
+      <p:sp>
+        <p:nvSpPr>
+          <p:cNvPr id="23" name="Rectangle 22"/>
+          <p:cNvSpPr/>
+          <p:nvPr/>
+        </p:nvSpPr>
+        <p:spPr>
+          <a:xfrm>
+            <a:off x="3810000" y="685800"/>
+            <a:ext cx="1295400" cy="609600"/>
+          </a:xfrm>
+          <a:prstGeom prst="rect">
+            <a:avLst/>
+          </a:prstGeom>
+          <a:solidFill>
+            <a:schemeClr val="tx1">
+              <a:lumMod val="50000"/>
+              <a:lumOff val="50000"/>
+            </a:schemeClr>
+          </a:solidFill>
+        </p:spPr>
+        <p:style>
+          <a:lnRef idx="3">
+            <a:schemeClr val="lt1"/>
+          </a:lnRef>
+          <a:fillRef idx="1">
+            <a:schemeClr val="accent2"/>
+          </a:fillRef>
+          <a:effectRef idx="1">
+            <a:schemeClr val="accent2"/>
+          </a:effectRef>
+          <a:fontRef idx="minor">
+            <a:schemeClr val="lt1"/>
+          </a:fontRef>
+        </p:style>
+        <p:txBody>
+          <a:bodyPr rtlCol="0" anchor="ctr"/>
+          <a:lstStyle/>
+          <a:p>
+            <a:pPr algn="ctr"/>
+            <a:r>
+              <a:rPr lang="en-US" dirty="0" smtClean="0"/>
+              <a:t>OBEX</a:t>
+            </a:r>
+            <a:endParaRPr lang="en-US" dirty="0"/>
+          </a:p>
+        </p:txBody>
+      </p:sp>
+      <p:sp>
+        <p:nvSpPr>
+          <p:cNvPr id="37" name="Rectangle 36"/>
+          <p:cNvSpPr/>
+          <p:nvPr/>
+        </p:nvSpPr>
+        <p:spPr>
+          <a:xfrm>
+            <a:off x="5182094" y="1371600"/>
+            <a:ext cx="1295400" cy="609600"/>
+          </a:xfrm>
+          <a:prstGeom prst="rect">
+            <a:avLst/>
+          </a:prstGeom>
+          <a:solidFill>
+            <a:schemeClr val="tx1">
+              <a:lumMod val="50000"/>
+              <a:lumOff val="50000"/>
+            </a:schemeClr>
+          </a:solidFill>
+        </p:spPr>
+        <p:style>
+          <a:lnRef idx="3">
+            <a:schemeClr val="lt1"/>
+          </a:lnRef>
+          <a:fillRef idx="1">
+            <a:schemeClr val="accent2"/>
+          </a:fillRef>
+          <a:effectRef idx="1">
+            <a:schemeClr val="accent2"/>
+          </a:effectRef>
+          <a:fontRef idx="minor">
+            <a:schemeClr val="lt1"/>
+          </a:fontRef>
+        </p:style>
+        <p:txBody>
+          <a:bodyPr rtlCol="0" anchor="ctr"/>
+          <a:lstStyle/>
+          <a:p>
+            <a:pPr algn="ctr"/>
+            <a:r>
+              <a:rPr lang="en-US" dirty="0" smtClean="0"/>
+              <a:t>GATT</a:t>
+            </a:r>
+            <a:endParaRPr lang="en-US" dirty="0"/>
+          </a:p>
+        </p:txBody>
+      </p:sp>
+      <p:sp>
+        <p:nvSpPr>
+          <p:cNvPr id="38" name="Rectangle 37"/>
+          <p:cNvSpPr/>
+          <p:nvPr/>
+        </p:nvSpPr>
+        <p:spPr>
+          <a:xfrm>
+            <a:off x="1066800" y="1371600"/>
+            <a:ext cx="1295400" cy="609600"/>
+          </a:xfrm>
+          <a:prstGeom prst="rect">
+            <a:avLst/>
+          </a:prstGeom>
+          <a:solidFill>
+            <a:schemeClr val="tx1">
+              <a:lumMod val="50000"/>
+              <a:lumOff val="50000"/>
+            </a:schemeClr>
+          </a:solidFill>
+        </p:spPr>
+        <p:style>
+          <a:lnRef idx="3">
+            <a:schemeClr val="lt1"/>
+          </a:lnRef>
+          <a:fillRef idx="1">
+            <a:schemeClr val="accent2"/>
+          </a:fillRef>
+          <a:effectRef idx="1">
+            <a:schemeClr val="accent2"/>
+          </a:effectRef>
+          <a:fontRef idx="minor">
+            <a:schemeClr val="lt1"/>
+          </a:fontRef>
+        </p:style>
+        <p:txBody>
+          <a:bodyPr rtlCol="0" anchor="ctr"/>
+          <a:lstStyle/>
+          <a:p>
+            <a:pPr algn="ctr"/>
+            <a:r>
+              <a:rPr lang="en-US" dirty="0" smtClean="0"/>
+              <a:t>BNEP</a:t>
+            </a:r>
+            <a:endParaRPr lang="en-US" dirty="0"/>
+          </a:p>
+        </p:txBody>
+      </p:sp>
+      <p:sp>
+        <p:nvSpPr>
+          <p:cNvPr id="40" name="Rectangle 39"/>
+          <p:cNvSpPr/>
+          <p:nvPr/>
+        </p:nvSpPr>
+        <p:spPr>
+          <a:xfrm>
+            <a:off x="6553200" y="2438401"/>
+            <a:ext cx="1296000" cy="609600"/>
+          </a:xfrm>
+          <a:prstGeom prst="rect">
+            <a:avLst/>
+          </a:prstGeom>
+        </p:spPr>
+        <p:style>
+          <a:lnRef idx="3">
+            <a:schemeClr val="lt1"/>
+          </a:lnRef>
+          <a:fillRef idx="1">
+            <a:schemeClr val="accent3"/>
+          </a:fillRef>
+          <a:effectRef idx="1">
+            <a:schemeClr val="accent3"/>
+          </a:effectRef>
+          <a:fontRef idx="minor">
+            <a:schemeClr val="lt1"/>
+          </a:fontRef>
+        </p:style>
+        <p:txBody>
+          <a:bodyPr rtlCol="0" anchor="ctr"/>
+          <a:lstStyle/>
+          <a:p>
+            <a:pPr algn="ctr"/>
+            <a:r>
+              <a:rPr lang="en-US" dirty="0" smtClean="0"/>
+              <a:t>SMP</a:t>
+            </a:r>
+            <a:endParaRPr lang="en-US" dirty="0"/>
+          </a:p>
+        </p:txBody>
+      </p:sp>
+      <p:sp>
+        <p:nvSpPr>
+          <p:cNvPr id="41" name="Rectangle 40"/>
+          <p:cNvSpPr/>
+          <p:nvPr/>
+        </p:nvSpPr>
+        <p:spPr>
+          <a:xfrm>
+            <a:off x="2439988" y="1371600"/>
+            <a:ext cx="1296000" cy="609600"/>
+          </a:xfrm>
+          <a:prstGeom prst="rect">
+            <a:avLst/>
+          </a:prstGeom>
+          <a:solidFill>
+            <a:schemeClr val="tx1">
+              <a:lumMod val="50000"/>
+              <a:lumOff val="50000"/>
+            </a:schemeClr>
+          </a:solidFill>
+        </p:spPr>
+        <p:style>
+          <a:lnRef idx="3">
+            <a:schemeClr val="lt1"/>
+          </a:lnRef>
+          <a:fillRef idx="1">
+            <a:schemeClr val="accent2"/>
+          </a:fillRef>
+          <a:effectRef idx="1">
+            <a:schemeClr val="accent2"/>
+          </a:effectRef>
+          <a:fontRef idx="minor">
+            <a:schemeClr val="lt1"/>
+          </a:fontRef>
+        </p:style>
+        <p:txBody>
+          <a:bodyPr rtlCol="0" anchor="ctr"/>
+          <a:lstStyle/>
+          <a:p>
+            <a:pPr algn="ctr"/>
+            <a:r>
+              <a:rPr lang="en-US" dirty="0" smtClean="0"/>
+              <a:t>SDAP</a:t>
+            </a:r>
+            <a:endParaRPr lang="en-US" dirty="0"/>
+          </a:p>
+        </p:txBody>
+      </p:sp>
+      <p:sp>
+        <p:nvSpPr>
+          <p:cNvPr id="44" name="Rectangle 43"/>
+          <p:cNvSpPr/>
+          <p:nvPr/>
+        </p:nvSpPr>
+        <p:spPr>
+          <a:xfrm>
+            <a:off x="5182094" y="3276601"/>
+            <a:ext cx="2667106" cy="685800"/>
+          </a:xfrm>
+          <a:prstGeom prst="rect">
+            <a:avLst/>
+          </a:prstGeom>
+        </p:spPr>
+        <p:style>
+          <a:lnRef idx="3">
+            <a:schemeClr val="lt1"/>
+          </a:lnRef>
+          <a:fillRef idx="1">
+            <a:schemeClr val="accent3"/>
+          </a:fillRef>
+          <a:effectRef idx="1">
+            <a:schemeClr val="accent3"/>
+          </a:effectRef>
+          <a:fontRef idx="minor">
+            <a:schemeClr val="lt1"/>
+          </a:fontRef>
+        </p:style>
+        <p:txBody>
+          <a:bodyPr rtlCol="0" anchor="ctr"/>
+          <a:lstStyle/>
+          <a:p>
+            <a:pPr algn="ctr"/>
+            <a:r>
+              <a:rPr lang="en-US" dirty="0" smtClean="0"/>
+              <a:t>L2CAP LE</a:t>
+            </a:r>
+            <a:endParaRPr lang="en-US" dirty="0"/>
+          </a:p>
+        </p:txBody>
+      </p:sp>
+    </p:spTree>
+  </p:cSld>
+  <p:clrMapOvr>
+    <a:masterClrMapping/>
+  </p:clrMapOvr>
+</p:sld>
+</file>
+
+<file path=ppt/slides/slide2.xml><?xml version="1.0" encoding="utf-8"?>
+<p:sld xmlns:a="http://schemas.openxmlformats.org/drawingml/2006/main" xmlns:r="http://schemas.openxmlformats.org/officeDocument/2006/relationships" xmlns:mc="http://schemas.openxmlformats.org/markup-compatibility/2006" xmlns:mv="urn:schemas-microsoft-com:mac:vml" xmlns:p="http://schemas.openxmlformats.org/presentationml/2006/main" mc:Ignorable="mv" mc:PreserveAttributes="mv:*">
+  <p:cSld>
+    <p:spTree>
+      <p:nvGrpSpPr>
+        <p:cNvPr id="1" name=""/>
+        <p:cNvGrpSpPr/>
+        <p:nvPr/>
+      </p:nvGrpSpPr>
+      <p:grpSpPr>
+        <a:xfrm>
+          <a:off x="0" y="0"/>
+          <a:ext cx="0" cy="0"/>
+          <a:chOff x="0" y="0"/>
+          <a:chExt cx="0" cy="0"/>
+        </a:xfrm>
+      </p:grpSpPr>
+      <p:grpSp>
+        <p:nvGrpSpPr>
+          <p:cNvPr id="67" name="Group 66"/>
+          <p:cNvGrpSpPr/>
+          <p:nvPr/>
+        </p:nvGrpSpPr>
+        <p:grpSpPr>
+          <a:xfrm>
+            <a:off x="914400" y="1371600"/>
+            <a:ext cx="6984000" cy="5003800"/>
+            <a:chOff x="914400" y="1371600"/>
+            <a:chExt cx="6984000" cy="5003800"/>
+          </a:xfrm>
+        </p:grpSpPr>
+        <p:cxnSp>
+          <p:nvCxnSpPr>
+            <p:cNvPr id="41" name="Straight Connector 40"/>
+            <p:cNvCxnSpPr/>
+            <p:nvPr/>
+          </p:nvCxnSpPr>
+          <p:spPr>
+            <a:xfrm rot="5400000">
+              <a:off x="7048747" y="3162053"/>
+              <a:ext cx="228600" cy="494"/>
+            </a:xfrm>
+            <a:prstGeom prst="line">
+              <a:avLst/>
+            </a:prstGeom>
+          </p:spPr>
+          <p:style>
+            <a:lnRef idx="2">
+              <a:schemeClr val="accent1"/>
+            </a:lnRef>
+            <a:fillRef idx="0">
+              <a:schemeClr val="accent1"/>
+            </a:fillRef>
+            <a:effectRef idx="1">
+              <a:schemeClr val="accent1"/>
+            </a:effectRef>
+            <a:fontRef idx="minor">
+              <a:schemeClr val="tx1"/>
+            </a:fontRef>
+          </p:style>
+        </p:cxnSp>
+        <p:cxnSp>
+          <p:nvCxnSpPr>
+            <p:cNvPr id="42" name="Straight Connector 41"/>
+            <p:cNvCxnSpPr/>
+            <p:nvPr/>
+          </p:nvCxnSpPr>
+          <p:spPr>
+            <a:xfrm rot="5400000">
+              <a:off x="4039520" y="4076575"/>
+              <a:ext cx="228600" cy="1840"/>
+            </a:xfrm>
+            <a:prstGeom prst="line">
+              <a:avLst/>
+            </a:prstGeom>
+          </p:spPr>
+          <p:style>
+            <a:lnRef idx="2">
+              <a:schemeClr val="accent1"/>
+            </a:lnRef>
+            <a:fillRef idx="0">
+              <a:schemeClr val="accent1"/>
+            </a:fillRef>
+            <a:effectRef idx="1">
+              <a:schemeClr val="accent1"/>
+            </a:effectRef>
+            <a:fontRef idx="minor">
+              <a:schemeClr val="tx1"/>
+            </a:fontRef>
+          </p:style>
+        </p:cxnSp>
+        <p:cxnSp>
+          <p:nvCxnSpPr>
+            <p:cNvPr id="43" name="Straight Connector 42"/>
+            <p:cNvCxnSpPr>
+              <a:stCxn id="49" idx="2"/>
+            </p:cNvCxnSpPr>
+            <p:nvPr/>
+          </p:nvCxnSpPr>
+          <p:spPr>
+            <a:xfrm rot="5400000">
+              <a:off x="2972497" y="3162698"/>
+              <a:ext cx="230188" cy="794"/>
+            </a:xfrm>
+            <a:prstGeom prst="line">
+              <a:avLst/>
+            </a:prstGeom>
+          </p:spPr>
+          <p:style>
+            <a:lnRef idx="2">
+              <a:schemeClr val="accent1"/>
+            </a:lnRef>
+            <a:fillRef idx="0">
+              <a:schemeClr val="accent1"/>
+            </a:fillRef>
+            <a:effectRef idx="1">
+              <a:schemeClr val="accent1"/>
+            </a:effectRef>
+            <a:fontRef idx="minor">
+              <a:schemeClr val="tx1"/>
+            </a:fontRef>
+          </p:style>
+        </p:cxnSp>
+        <p:cxnSp>
+          <p:nvCxnSpPr>
+            <p:cNvPr id="44" name="Straight Connector 43"/>
+            <p:cNvCxnSpPr>
+              <a:stCxn id="50" idx="2"/>
+            </p:cNvCxnSpPr>
+            <p:nvPr/>
+          </p:nvCxnSpPr>
+          <p:spPr>
+            <a:xfrm rot="5400000">
+              <a:off x="4343099" y="3162302"/>
+              <a:ext cx="228602" cy="1588"/>
+            </a:xfrm>
+            <a:prstGeom prst="line">
+              <a:avLst/>
+            </a:prstGeom>
+          </p:spPr>
+          <p:style>
+            <a:lnRef idx="2">
+              <a:schemeClr val="accent1"/>
+            </a:lnRef>
+            <a:fillRef idx="0">
+              <a:schemeClr val="accent1"/>
+            </a:fillRef>
+            <a:effectRef idx="1">
+              <a:schemeClr val="accent1"/>
+            </a:effectRef>
+            <a:fontRef idx="minor">
+              <a:schemeClr val="tx1"/>
+            </a:fontRef>
+          </p:style>
+        </p:cxnSp>
+        <p:cxnSp>
+          <p:nvCxnSpPr>
+            <p:cNvPr id="45" name="Straight Connector 44"/>
+            <p:cNvCxnSpPr>
+              <a:stCxn id="51" idx="2"/>
+            </p:cNvCxnSpPr>
+            <p:nvPr/>
+          </p:nvCxnSpPr>
+          <p:spPr>
+            <a:xfrm rot="5400000">
+              <a:off x="5714947" y="3162054"/>
+              <a:ext cx="228600" cy="494"/>
+            </a:xfrm>
+            <a:prstGeom prst="line">
+              <a:avLst/>
+            </a:prstGeom>
+          </p:spPr>
+          <p:style>
+            <a:lnRef idx="2">
+              <a:schemeClr val="accent1"/>
+            </a:lnRef>
+            <a:fillRef idx="0">
+              <a:schemeClr val="accent1"/>
+            </a:fillRef>
+            <a:effectRef idx="1">
+              <a:schemeClr val="accent1"/>
+            </a:effectRef>
+            <a:fontRef idx="minor">
+              <a:schemeClr val="tx1"/>
+            </a:fontRef>
+          </p:style>
+        </p:cxnSp>
+        <p:sp>
+          <p:nvSpPr>
+            <p:cNvPr id="46" name="Rectangle 45"/>
+            <p:cNvSpPr/>
+            <p:nvPr/>
+          </p:nvSpPr>
+          <p:spPr>
+            <a:xfrm>
+              <a:off x="990600" y="5689600"/>
+              <a:ext cx="6858600" cy="685800"/>
+            </a:xfrm>
+            <a:prstGeom prst="rect">
+              <a:avLst/>
+            </a:prstGeom>
+            <a:solidFill>
+              <a:schemeClr val="bg1">
+                <a:lumMod val="50000"/>
+              </a:schemeClr>
+            </a:solidFill>
+          </p:spPr>
+          <p:style>
+            <a:lnRef idx="3">
+              <a:schemeClr val="lt1"/>
+            </a:lnRef>
+            <a:fillRef idx="1">
+              <a:schemeClr val="accent4"/>
+            </a:fillRef>
+            <a:effectRef idx="1">
+              <a:schemeClr val="accent4"/>
+            </a:effectRef>
+            <a:fontRef idx="minor">
+              <a:schemeClr val="lt1"/>
+            </a:fontRef>
+          </p:style>
+          <p:txBody>
+            <a:bodyPr rtlCol="0" anchor="ctr"/>
+            <a:lstStyle/>
+            <a:p>
+              <a:pPr algn="ctr"/>
+              <a:r>
+                <a:rPr lang="en-US" dirty="0" smtClean="0"/>
+                <a:t>Bluetooth Single/Dual Mode Chipset</a:t>
+              </a:r>
+              <a:endParaRPr lang="en-US" dirty="0"/>
+            </a:p>
+          </p:txBody>
+        </p:sp>
+        <p:sp>
+          <p:nvSpPr>
+            <p:cNvPr id="47" name="Rectangle 46"/>
+            <p:cNvSpPr/>
+            <p:nvPr/>
+          </p:nvSpPr>
+          <p:spPr>
+            <a:xfrm>
+              <a:off x="990600" y="4191001"/>
+              <a:ext cx="6858600" cy="609600"/>
+            </a:xfrm>
+            <a:prstGeom prst="rect">
+              <a:avLst/>
+            </a:prstGeom>
+          </p:spPr>
+          <p:style>
+            <a:lnRef idx="3">
+              <a:schemeClr val="lt1"/>
+            </a:lnRef>
+            <a:fillRef idx="1">
+              <a:schemeClr val="accent1"/>
+            </a:fillRef>
+            <a:effectRef idx="1">
+              <a:schemeClr val="accent1"/>
+            </a:effectRef>
+            <a:fontRef idx="minor">
+              <a:schemeClr val="lt1"/>
+            </a:fontRef>
+          </p:style>
+          <p:txBody>
+            <a:bodyPr rtlCol="0" anchor="ctr"/>
+            <a:lstStyle/>
+            <a:p>
+              <a:pPr algn="ctr"/>
+              <a:r>
+                <a:rPr lang="en-US" dirty="0" smtClean="0"/>
+                <a:t>HCI</a:t>
+              </a:r>
+              <a:endParaRPr lang="en-US" dirty="0"/>
+            </a:p>
+          </p:txBody>
+        </p:sp>
+        <p:sp>
+          <p:nvSpPr>
+            <p:cNvPr id="48" name="Rectangle 47"/>
+            <p:cNvSpPr/>
+            <p:nvPr/>
+          </p:nvSpPr>
+          <p:spPr>
+            <a:xfrm>
+              <a:off x="991200" y="3276601"/>
+              <a:ext cx="4190400" cy="685800"/>
+            </a:xfrm>
+            <a:prstGeom prst="rect">
+              <a:avLst/>
+            </a:prstGeom>
+          </p:spPr>
+          <p:style>
+            <a:lnRef idx="3">
+              <a:schemeClr val="lt1"/>
+            </a:lnRef>
+            <a:fillRef idx="1">
+              <a:schemeClr val="accent1"/>
+            </a:fillRef>
+            <a:effectRef idx="1">
+              <a:schemeClr val="accent1"/>
+            </a:effectRef>
+            <a:fontRef idx="minor">
+              <a:schemeClr val="lt1"/>
+            </a:fontRef>
+          </p:style>
+          <p:txBody>
+            <a:bodyPr rtlCol="0" anchor="ctr"/>
+            <a:lstStyle/>
+            <a:p>
+              <a:pPr algn="ctr"/>
+              <a:r>
+                <a:rPr lang="en-US" dirty="0" smtClean="0"/>
+                <a:t>L2CAP</a:t>
+              </a:r>
+              <a:endParaRPr lang="en-US" dirty="0"/>
+            </a:p>
+          </p:txBody>
+        </p:sp>
+        <p:sp>
+          <p:nvSpPr>
+            <p:cNvPr id="49" name="Rectangle 48"/>
+            <p:cNvSpPr/>
+            <p:nvPr/>
+          </p:nvSpPr>
+          <p:spPr>
+            <a:xfrm>
+              <a:off x="2439988" y="2438401"/>
+              <a:ext cx="1296000" cy="609600"/>
+            </a:xfrm>
+            <a:prstGeom prst="rect">
+              <a:avLst/>
+            </a:prstGeom>
+          </p:spPr>
+          <p:style>
+            <a:lnRef idx="3">
+              <a:schemeClr val="lt1"/>
+            </a:lnRef>
+            <a:fillRef idx="1">
+              <a:schemeClr val="accent1"/>
+            </a:fillRef>
+            <a:effectRef idx="1">
+              <a:schemeClr val="accent1"/>
+            </a:effectRef>
+            <a:fontRef idx="minor">
+              <a:schemeClr val="lt1"/>
+            </a:fontRef>
+          </p:style>
+          <p:txBody>
+            <a:bodyPr rtlCol="0" anchor="ctr"/>
+            <a:lstStyle/>
+            <a:p>
+              <a:pPr algn="ctr"/>
+              <a:r>
+                <a:rPr lang="en-US" dirty="0" smtClean="0"/>
+                <a:t>SDP</a:t>
+              </a:r>
+              <a:endParaRPr lang="en-US" dirty="0"/>
+            </a:p>
+          </p:txBody>
+        </p:sp>
+        <p:sp>
+          <p:nvSpPr>
+            <p:cNvPr id="50" name="Rectangle 49"/>
+            <p:cNvSpPr/>
+            <p:nvPr/>
+          </p:nvSpPr>
+          <p:spPr>
+            <a:xfrm>
+              <a:off x="3809400" y="2438401"/>
+              <a:ext cx="1296000" cy="609600"/>
+            </a:xfrm>
+            <a:prstGeom prst="rect">
+              <a:avLst/>
+            </a:prstGeom>
+          </p:spPr>
+          <p:style>
+            <a:lnRef idx="3">
+              <a:schemeClr val="lt1"/>
+            </a:lnRef>
+            <a:fillRef idx="1">
+              <a:schemeClr val="accent1"/>
+            </a:fillRef>
+            <a:effectRef idx="1">
+              <a:schemeClr val="accent1"/>
+            </a:effectRef>
+            <a:fontRef idx="minor">
+              <a:schemeClr val="lt1"/>
+            </a:fontRef>
+          </p:style>
+          <p:txBody>
+            <a:bodyPr rtlCol="0" anchor="ctr"/>
+            <a:lstStyle/>
+            <a:p>
+              <a:pPr algn="ctr"/>
+              <a:r>
+                <a:rPr lang="en-US" dirty="0" smtClean="0"/>
+                <a:t>RFCOMM</a:t>
+              </a:r>
+              <a:endParaRPr lang="en-US" dirty="0"/>
+            </a:p>
+          </p:txBody>
+        </p:sp>
+        <p:sp>
+          <p:nvSpPr>
+            <p:cNvPr id="51" name="Rectangle 50"/>
+            <p:cNvSpPr/>
+            <p:nvPr/>
+          </p:nvSpPr>
+          <p:spPr>
+            <a:xfrm>
+              <a:off x="5181494" y="2438401"/>
+              <a:ext cx="1296000" cy="609600"/>
+            </a:xfrm>
+            <a:prstGeom prst="rect">
+              <a:avLst/>
+            </a:prstGeom>
+          </p:spPr>
+          <p:style>
+            <a:lnRef idx="3">
+              <a:schemeClr val="lt1"/>
+            </a:lnRef>
+            <a:fillRef idx="1">
+              <a:schemeClr val="accent3"/>
+            </a:fillRef>
+            <a:effectRef idx="1">
+              <a:schemeClr val="accent3"/>
+            </a:effectRef>
+            <a:fontRef idx="minor">
+              <a:schemeClr val="lt1"/>
+            </a:fontRef>
+          </p:style>
+          <p:txBody>
+            <a:bodyPr rtlCol="0" anchor="ctr"/>
+            <a:lstStyle/>
+            <a:p>
+              <a:pPr algn="ctr"/>
+              <a:r>
+                <a:rPr lang="en-US" dirty="0" smtClean="0"/>
+                <a:t>ATT</a:t>
+              </a:r>
+              <a:endParaRPr lang="en-US" dirty="0"/>
+            </a:p>
+          </p:txBody>
+        </p:sp>
+        <p:cxnSp>
+          <p:nvCxnSpPr>
+            <p:cNvPr id="52" name="Straight Connector 51"/>
+            <p:cNvCxnSpPr/>
+            <p:nvPr/>
+          </p:nvCxnSpPr>
+          <p:spPr>
+            <a:xfrm>
+              <a:off x="914400" y="5476320"/>
+              <a:ext cx="6984000" cy="1588"/>
+            </a:xfrm>
+            <a:prstGeom prst="line">
+              <a:avLst/>
+            </a:prstGeom>
+          </p:spPr>
+          <p:style>
+            <a:lnRef idx="2">
+              <a:schemeClr val="accent2"/>
+            </a:lnRef>
+            <a:fillRef idx="0">
+              <a:schemeClr val="accent2"/>
+            </a:fillRef>
+            <a:effectRef idx="1">
+              <a:schemeClr val="accent2"/>
+            </a:effectRef>
+            <a:fontRef idx="minor">
+              <a:schemeClr val="tx1"/>
+            </a:fontRef>
+          </p:style>
+        </p:cxnSp>
+        <p:sp>
+          <p:nvSpPr>
+            <p:cNvPr id="53" name="Rectangle 52"/>
+            <p:cNvSpPr/>
+            <p:nvPr/>
+          </p:nvSpPr>
+          <p:spPr>
+            <a:xfrm>
+              <a:off x="990600" y="4800601"/>
+              <a:ext cx="1324429" cy="457200"/>
+            </a:xfrm>
+            <a:prstGeom prst="rect">
+              <a:avLst/>
+            </a:prstGeom>
+          </p:spPr>
+          <p:style>
+            <a:lnRef idx="3">
+              <a:schemeClr val="lt1"/>
+            </a:lnRef>
+            <a:fillRef idx="1">
+              <a:schemeClr val="accent1"/>
+            </a:fillRef>
+            <a:effectRef idx="1">
+              <a:schemeClr val="accent1"/>
+            </a:effectRef>
+            <a:fontRef idx="minor">
+              <a:schemeClr val="lt1"/>
+            </a:fontRef>
+          </p:style>
+          <p:txBody>
+            <a:bodyPr rtlCol="0" anchor="ctr"/>
+            <a:lstStyle/>
+            <a:p>
+              <a:pPr algn="ctr"/>
+              <a:r>
+                <a:rPr lang="en-US" dirty="0" smtClean="0"/>
+                <a:t>H4 UART</a:t>
+              </a:r>
+              <a:endParaRPr lang="en-US" dirty="0"/>
+            </a:p>
+          </p:txBody>
+        </p:sp>
+        <p:sp>
+          <p:nvSpPr>
+            <p:cNvPr id="54" name="Rectangle 53"/>
+            <p:cNvSpPr/>
+            <p:nvPr/>
+          </p:nvSpPr>
+          <p:spPr>
+            <a:xfrm>
+              <a:off x="2555991" y="4811094"/>
+              <a:ext cx="1863609" cy="446707"/>
+            </a:xfrm>
+            <a:prstGeom prst="rect">
+              <a:avLst/>
+            </a:prstGeom>
+            <a:ln/>
+          </p:spPr>
+          <p:style>
+            <a:lnRef idx="3">
+              <a:schemeClr val="lt1"/>
+            </a:lnRef>
+            <a:fillRef idx="1">
+              <a:schemeClr val="accent1"/>
+            </a:fillRef>
+            <a:effectRef idx="1">
+              <a:schemeClr val="accent1"/>
+            </a:effectRef>
+            <a:fontRef idx="minor">
+              <a:schemeClr val="lt1"/>
+            </a:fontRef>
+          </p:style>
+          <p:txBody>
+            <a:bodyPr/>
+            <a:lstStyle/>
+            <a:p>
+              <a:pPr algn="ctr"/>
+              <a:r>
+                <a:rPr lang="en-US" dirty="0" err="1" smtClean="0"/>
+                <a:t>eHCILL</a:t>
+              </a:r>
+              <a:r>
+                <a:rPr lang="en-US" dirty="0" smtClean="0"/>
+                <a:t> UART </a:t>
+              </a:r>
+              <a:endParaRPr lang="en-US" dirty="0"/>
+            </a:p>
+          </p:txBody>
+        </p:sp>
+        <p:sp>
+          <p:nvSpPr>
+            <p:cNvPr id="55" name="Rectangle 54"/>
+            <p:cNvSpPr/>
+            <p:nvPr/>
+          </p:nvSpPr>
+          <p:spPr>
+            <a:xfrm>
+              <a:off x="6514763" y="4811094"/>
+              <a:ext cx="1333837" cy="446707"/>
+            </a:xfrm>
+            <a:prstGeom prst="rect">
+              <a:avLst/>
+            </a:prstGeom>
+            <a:ln/>
+          </p:spPr>
+          <p:style>
+            <a:lnRef idx="3">
+              <a:schemeClr val="lt1"/>
+            </a:lnRef>
+            <a:fillRef idx="1">
+              <a:schemeClr val="accent1"/>
+            </a:fillRef>
+            <a:effectRef idx="1">
+              <a:schemeClr val="accent1"/>
+            </a:effectRef>
+            <a:fontRef idx="minor">
+              <a:schemeClr val="lt1"/>
+            </a:fontRef>
+          </p:style>
+          <p:txBody>
+            <a:bodyPr/>
+            <a:lstStyle/>
+            <a:p>
+              <a:pPr algn="ctr"/>
+              <a:r>
+                <a:rPr lang="en-US" dirty="0" smtClean="0"/>
+                <a:t>USB</a:t>
+              </a:r>
+              <a:endParaRPr lang="en-US" dirty="0"/>
+            </a:p>
+          </p:txBody>
+        </p:sp>
+        <p:sp>
+          <p:nvSpPr>
+            <p:cNvPr id="56" name="TextBox 55"/>
+            <p:cNvSpPr txBox="1"/>
+            <p:nvPr/>
+          </p:nvSpPr>
+          <p:spPr>
+            <a:xfrm>
+              <a:off x="4871962" y="4888469"/>
+              <a:ext cx="1147838" cy="369332"/>
+            </a:xfrm>
+            <a:prstGeom prst="rect">
+              <a:avLst/>
+            </a:prstGeom>
+            <a:noFill/>
+          </p:spPr>
+          <p:txBody>
+            <a:bodyPr wrap="square" rtlCol="0">
+              <a:spAutoFit/>
+            </a:bodyPr>
+            <a:lstStyle/>
+            <a:p>
+              <a:pPr algn="ctr"/>
+              <a:r>
+                <a:rPr lang="en-US" dirty="0" smtClean="0"/>
+                <a:t>…</a:t>
+              </a:r>
+              <a:endParaRPr lang="en-US" dirty="0"/>
+            </a:p>
+          </p:txBody>
+        </p:sp>
+        <p:cxnSp>
+          <p:nvCxnSpPr>
+            <p:cNvPr id="57" name="Straight Connector 56"/>
+            <p:cNvCxnSpPr/>
+            <p:nvPr/>
+          </p:nvCxnSpPr>
+          <p:spPr>
+            <a:xfrm>
+              <a:off x="914400" y="2209800"/>
+              <a:ext cx="6984000" cy="1588"/>
+            </a:xfrm>
+            <a:prstGeom prst="line">
+              <a:avLst/>
+            </a:prstGeom>
+          </p:spPr>
+          <p:style>
+            <a:lnRef idx="2">
+              <a:schemeClr val="accent2"/>
+            </a:lnRef>
+            <a:fillRef idx="0">
+              <a:schemeClr val="accent2"/>
+            </a:fillRef>
+            <a:effectRef idx="1">
+              <a:schemeClr val="accent2"/>
+            </a:effectRef>
+            <a:fontRef idx="minor">
+              <a:schemeClr val="tx1"/>
+            </a:fontRef>
+          </p:style>
+        </p:cxnSp>
+        <p:sp>
+          <p:nvSpPr>
+            <p:cNvPr id="58" name="Rectangle 57"/>
+            <p:cNvSpPr/>
+            <p:nvPr/>
+          </p:nvSpPr>
+          <p:spPr>
+            <a:xfrm>
+              <a:off x="3809400" y="1371600"/>
+              <a:ext cx="1296000" cy="609600"/>
+            </a:xfrm>
+            <a:prstGeom prst="rect">
+              <a:avLst/>
+            </a:prstGeom>
+          </p:spPr>
+          <p:style>
+            <a:lnRef idx="3">
+              <a:schemeClr val="lt1"/>
+            </a:lnRef>
+            <a:fillRef idx="1">
+              <a:schemeClr val="accent4"/>
+            </a:fillRef>
+            <a:effectRef idx="1">
+              <a:schemeClr val="accent4"/>
+            </a:effectRef>
+            <a:fontRef idx="minor">
+              <a:schemeClr val="lt1"/>
+            </a:fontRef>
+          </p:style>
+          <p:txBody>
+            <a:bodyPr rtlCol="0" anchor="ctr"/>
+            <a:lstStyle/>
+            <a:p>
+              <a:pPr algn="ctr"/>
+              <a:r>
+                <a:rPr lang="en-US" dirty="0" smtClean="0"/>
+                <a:t>SPP</a:t>
+              </a:r>
+              <a:endParaRPr lang="en-US" dirty="0"/>
+            </a:p>
+          </p:txBody>
+        </p:sp>
+        <p:sp>
+          <p:nvSpPr>
+            <p:cNvPr id="60" name="Rectangle 59"/>
+            <p:cNvSpPr/>
+            <p:nvPr/>
+          </p:nvSpPr>
+          <p:spPr>
+            <a:xfrm>
+              <a:off x="5182094" y="1371600"/>
+              <a:ext cx="1295400" cy="609600"/>
+            </a:xfrm>
+            <a:prstGeom prst="rect">
+              <a:avLst/>
+            </a:prstGeom>
+          </p:spPr>
+          <p:style>
+            <a:lnRef idx="3">
+              <a:schemeClr val="lt1"/>
+            </a:lnRef>
+            <a:fillRef idx="1">
+              <a:schemeClr val="accent4"/>
+            </a:fillRef>
+            <a:effectRef idx="1">
+              <a:schemeClr val="accent4"/>
+            </a:effectRef>
+            <a:fontRef idx="minor">
+              <a:schemeClr val="lt1"/>
+            </a:fontRef>
+          </p:style>
+          <p:txBody>
+            <a:bodyPr rtlCol="0" anchor="ctr"/>
+            <a:lstStyle/>
+            <a:p>
+              <a:pPr algn="ctr"/>
+              <a:r>
+                <a:rPr lang="en-US" dirty="0" smtClean="0"/>
+                <a:t>GATT</a:t>
+              </a:r>
+              <a:endParaRPr lang="en-US" dirty="0"/>
+            </a:p>
+          </p:txBody>
+        </p:sp>
+        <p:sp>
+          <p:nvSpPr>
+            <p:cNvPr id="62" name="Rectangle 61"/>
+            <p:cNvSpPr/>
+            <p:nvPr/>
+          </p:nvSpPr>
+          <p:spPr>
+            <a:xfrm>
+              <a:off x="6553200" y="2438401"/>
+              <a:ext cx="1296000" cy="609600"/>
+            </a:xfrm>
+            <a:prstGeom prst="rect">
+              <a:avLst/>
+            </a:prstGeom>
+          </p:spPr>
+          <p:style>
+            <a:lnRef idx="3">
+              <a:schemeClr val="lt1"/>
+            </a:lnRef>
+            <a:fillRef idx="1">
+              <a:schemeClr val="accent3"/>
+            </a:fillRef>
+            <a:effectRef idx="1">
+              <a:schemeClr val="accent3"/>
+            </a:effectRef>
+            <a:fontRef idx="minor">
+              <a:schemeClr val="lt1"/>
+            </a:fontRef>
+          </p:style>
+          <p:txBody>
+            <a:bodyPr rtlCol="0" anchor="ctr"/>
+            <a:lstStyle/>
+            <a:p>
+              <a:pPr algn="ctr"/>
+              <a:r>
+                <a:rPr lang="en-US" dirty="0" smtClean="0"/>
+                <a:t>SMP</a:t>
+              </a:r>
+              <a:endParaRPr lang="en-US" dirty="0"/>
+            </a:p>
+          </p:txBody>
+        </p:sp>
+        <p:sp>
+          <p:nvSpPr>
+            <p:cNvPr id="64" name="Rectangle 63"/>
+            <p:cNvSpPr/>
+            <p:nvPr/>
+          </p:nvSpPr>
+          <p:spPr>
+            <a:xfrm>
+              <a:off x="5182094" y="3276601"/>
+              <a:ext cx="2667106" cy="685800"/>
+            </a:xfrm>
+            <a:prstGeom prst="rect">
+              <a:avLst/>
+            </a:prstGeom>
+          </p:spPr>
+          <p:style>
+            <a:lnRef idx="3">
+              <a:schemeClr val="lt1"/>
+            </a:lnRef>
+            <a:fillRef idx="1">
+              <a:schemeClr val="accent3"/>
+            </a:fillRef>
+            <a:effectRef idx="1">
+              <a:schemeClr val="accent3"/>
+            </a:effectRef>
+            <a:fontRef idx="minor">
+              <a:schemeClr val="lt1"/>
+            </a:fontRef>
+          </p:style>
+          <p:txBody>
+            <a:bodyPr rtlCol="0" anchor="ctr"/>
+            <a:lstStyle/>
+            <a:p>
+              <a:pPr algn="ctr"/>
+              <a:r>
+                <a:rPr lang="en-US" dirty="0" smtClean="0"/>
+                <a:t>L2CAP LE</a:t>
+              </a:r>
+              <a:endParaRPr lang="en-US" dirty="0"/>
+            </a:p>
+          </p:txBody>
+        </p:sp>
+        <p:sp>
+          <p:nvSpPr>
+            <p:cNvPr id="65" name="Rectangle 64"/>
+            <p:cNvSpPr/>
+            <p:nvPr/>
+          </p:nvSpPr>
+          <p:spPr>
+            <a:xfrm>
+              <a:off x="991200" y="1764268"/>
+              <a:ext cx="882686" cy="369332"/>
+            </a:xfrm>
+            <a:prstGeom prst="rect">
+              <a:avLst/>
+            </a:prstGeom>
+          </p:spPr>
+          <p:txBody>
+            <a:bodyPr wrap="none">
+              <a:spAutoFit/>
+            </a:bodyPr>
+            <a:lstStyle/>
+            <a:p>
+              <a:r>
+                <a:rPr lang="en-US" dirty="0" smtClean="0"/>
+                <a:t>Profiles</a:t>
+              </a:r>
+              <a:endParaRPr lang="en-US" dirty="0"/>
+            </a:p>
+          </p:txBody>
+        </p:sp>
+        <p:sp>
+          <p:nvSpPr>
+            <p:cNvPr id="66" name="Rectangle 65"/>
+            <p:cNvSpPr/>
+            <p:nvPr/>
+          </p:nvSpPr>
+          <p:spPr>
+            <a:xfrm>
+              <a:off x="991200" y="2253735"/>
+              <a:ext cx="1059868" cy="369332"/>
+            </a:xfrm>
+            <a:prstGeom prst="rect">
+              <a:avLst/>
+            </a:prstGeom>
+          </p:spPr>
+          <p:txBody>
+            <a:bodyPr wrap="none">
+              <a:spAutoFit/>
+            </a:bodyPr>
+            <a:lstStyle/>
+            <a:p>
+              <a:r>
+                <a:rPr lang="en-US" dirty="0" smtClean="0"/>
+                <a:t>Protocols</a:t>
+              </a:r>
+              <a:endParaRPr lang="en-US" dirty="0"/>
+            </a:p>
+          </p:txBody>
+        </p:sp>
+      </p:grpSp>
+    </p:spTree>
+  </p:cSld>
+  <p:clrMapOvr>
+    <a:masterClrMapping/>
+  </p:clrMapOvr>
+</p:sld>
 </file>
 
 <file path=ppt/theme/theme1.xml><?xml version="1.0" encoding="utf-8"?>
